--- a/PQC_FedLoRA_Judge_Presentation.pptx
+++ b/PQC_FedLoRA_Judge_Presentation.pptx
@@ -3173,19 +3173,19 @@
               </a:defRPr>
             </a:pPr>
             <a:r>
-              <a:t>HACKATHON GRAND PITCH | HEALTHCARE AI TRACK</a:t>
-            </a:r>
-          </a:p>
-          <a:p>
-            <a:pPr>
-              <a:defRPr sz="2800" b="1">
-                <a:solidFill>
-                  <a:srgbClr val="FFFFFF"/>
-                </a:solidFill>
-              </a:defRPr>
-            </a:pPr>
-            <a:r>
-              <a:t>PQC-FedLoRA: Quantum-Secure Federated Learning Framework</a:t>
+              <a:t>ALGOTHON'26 | TRACK 2: ALG-CYBER-02 (SECURE THE APPLICATION)</a:t>
+            </a:r>
+          </a:p>
+          <a:p>
+            <a:pPr>
+              <a:defRPr sz="2600" b="1">
+                <a:solidFill>
+                  <a:srgbClr val="FFFFFF"/>
+                </a:solidFill>
+              </a:defRPr>
+            </a:pPr>
+            <a:r>
+              <a:t>PQC-FedLoRA: Application Security Inspection, Safe Exploit Demonstration</a:t>
             </a:r>
           </a:p>
           <a:p>
@@ -3197,7 +3197,7 @@
               </a:defRPr>
             </a:pPr>
             <a:r>
-              <a:t>with Real-Time Dual-Stage Hallucination Defense for Critical Healthcare</a:t>
+              <a:t>&amp; NIST Post-Quantum Cryptographic Remediation for Healthcare AI</a:t>
             </a:r>
           </a:p>
         </p:txBody>
@@ -3280,67 +3280,67 @@
               </a:defRPr>
             </a:pPr>
             <a:r>
-              <a:t>Project Essence</a:t>
-            </a:r>
-          </a:p>
-          <a:p>
-            <a:pPr>
-              <a:spcAft>
-                <a:spcPts val="500"/>
-              </a:spcAft>
-              <a:defRPr sz="1100">
-                <a:solidFill>
-                  <a:srgbClr val="FFFFFF"/>
-                </a:solidFill>
-              </a:defRPr>
-            </a:pPr>
-            <a:r>
-              <a:t>• Collaborative clinical AI across hospitals</a:t>
-            </a:r>
-          </a:p>
-          <a:p>
-            <a:pPr>
-              <a:spcAft>
-                <a:spcPts val="500"/>
-              </a:spcAft>
-              <a:defRPr sz="1100">
-                <a:solidFill>
-                  <a:srgbClr val="FFFFFF"/>
-                </a:solidFill>
-              </a:defRPr>
-            </a:pPr>
-            <a:r>
-              <a:t>• Zero raw patient data leaves hospital walls</a:t>
-            </a:r>
-          </a:p>
-          <a:p>
-            <a:pPr>
-              <a:spcAft>
-                <a:spcPts val="500"/>
-              </a:spcAft>
-              <a:defRPr sz="1100">
-                <a:solidFill>
-                  <a:srgbClr val="FFFFFF"/>
-                </a:solidFill>
-              </a:defRPr>
-            </a:pPr>
-            <a:r>
-              <a:t>• HIPAA &amp; GDPR privacy compliance guaranteed</a:t>
-            </a:r>
-          </a:p>
-          <a:p>
-            <a:pPr>
-              <a:spcAft>
-                <a:spcPts val="500"/>
-              </a:spcAft>
-              <a:defRPr sz="1100">
-                <a:solidFill>
-                  <a:srgbClr val="FFFFFF"/>
-                </a:solidFill>
-              </a:defRPr>
-            </a:pPr>
-            <a:r>
-              <a:t>• Production-grade API + real-time web telemetry</a:t>
+              <a:t>ALG-CYBER-02 Focus</a:t>
+            </a:r>
+          </a:p>
+          <a:p>
+            <a:pPr>
+              <a:spcAft>
+                <a:spcPts val="500"/>
+              </a:spcAft>
+              <a:defRPr sz="1100">
+                <a:solidFill>
+                  <a:srgbClr val="FFFFFF"/>
+                </a:solidFill>
+              </a:defRPr>
+            </a:pPr>
+            <a:r>
+              <a:t>• Inspects deliberately vulnerable multi-node AI app</a:t>
+            </a:r>
+          </a:p>
+          <a:p>
+            <a:pPr>
+              <a:spcAft>
+                <a:spcPts val="500"/>
+              </a:spcAft>
+              <a:defRPr sz="1100">
+                <a:solidFill>
+                  <a:srgbClr val="FFFFFF"/>
+                </a:solidFill>
+              </a:defRPr>
+            </a:pPr>
+            <a:r>
+              <a:t>• Demonstrates Shor's HNDL, poisoning &amp; injection</a:t>
+            </a:r>
+          </a:p>
+          <a:p>
+            <a:pPr>
+              <a:spcAft>
+                <a:spcPts val="500"/>
+              </a:spcAft>
+              <a:defRPr sz="1100">
+                <a:solidFill>
+                  <a:srgbClr val="FFFFFF"/>
+                </a:solidFill>
+              </a:defRPr>
+            </a:pPr>
+            <a:r>
+              <a:t>• Root-cause NIST FIPS 203 &amp; 204 cryptographic patches</a:t>
+            </a:r>
+          </a:p>
+          <a:p>
+            <a:pPr>
+              <a:spcAft>
+                <a:spcPts val="500"/>
+              </a:spcAft>
+              <a:defRPr sz="1100">
+                <a:solidFill>
+                  <a:srgbClr val="FFFFFF"/>
+                </a:solidFill>
+              </a:defRPr>
+            </a:pPr>
+            <a:r>
+              <a:t>• Automated regression retesting with zero service disruption</a:t>
             </a:r>
           </a:p>
         </p:txBody>
@@ -3423,67 +3423,67 @@
               </a:defRPr>
             </a:pPr>
             <a:r>
-              <a:t>Core Innovations</a:t>
-            </a:r>
-          </a:p>
-          <a:p>
-            <a:pPr>
-              <a:spcAft>
-                <a:spcPts val="500"/>
-              </a:spcAft>
-              <a:defRPr sz="1100">
-                <a:solidFill>
-                  <a:srgbClr val="FFFFFF"/>
-                </a:solidFill>
-              </a:defRPr>
-            </a:pPr>
-            <a:r>
-              <a:t>• NIST FIPS 203 Kyber-1024 Lattice Cryptography</a:t>
-            </a:r>
-          </a:p>
-          <a:p>
-            <a:pPr>
-              <a:spcAft>
-                <a:spcPts val="500"/>
-              </a:spcAft>
-              <a:defRPr sz="1100">
-                <a:solidFill>
-                  <a:srgbClr val="FFFFFF"/>
-                </a:solidFill>
-              </a:defRPr>
-            </a:pPr>
-            <a:r>
-              <a:t>• Parameter-Efficient FedLoRA (99.2% WAN compression)</a:t>
-            </a:r>
-          </a:p>
-          <a:p>
-            <a:pPr>
-              <a:spcAft>
-                <a:spcPts val="500"/>
-              </a:spcAft>
-              <a:defRPr sz="1100">
-                <a:solidFill>
-                  <a:srgbClr val="FFFFFF"/>
-                </a:solidFill>
-              </a:defRPr>
-            </a:pPr>
-            <a:r>
-              <a:t>• Dual-threshold predictive token entropy scan</a:t>
-            </a:r>
-          </a:p>
-          <a:p>
-            <a:pPr>
-              <a:spcAft>
-                <a:spcPts val="500"/>
-              </a:spcAft>
-              <a:defRPr sz="1100">
-                <a:solidFill>
-                  <a:srgbClr val="FFFFFF"/>
-                </a:solidFill>
-              </a:defRPr>
-            </a:pPr>
-            <a:r>
-              <a:t>• NLI MedQuAD consensus cross-verification</a:t>
+              <a:t>Targeted Weaknesses</a:t>
+            </a:r>
+          </a:p>
+          <a:p>
+            <a:pPr>
+              <a:spcAft>
+                <a:spcPts val="500"/>
+              </a:spcAft>
+              <a:defRPr sz="1100">
+                <a:solidFill>
+                  <a:srgbClr val="FFFFFF"/>
+                </a:solidFill>
+              </a:defRPr>
+            </a:pPr>
+            <a:r>
+              <a:t>• VULN-01: Weak Transport &amp; Shor's Quantum Decryption</a:t>
+            </a:r>
+          </a:p>
+          <a:p>
+            <a:pPr>
+              <a:spcAft>
+                <a:spcPts val="500"/>
+              </a:spcAft>
+              <a:defRPr sz="1100">
+                <a:solidFill>
+                  <a:srgbClr val="FFFFFF"/>
+                </a:solidFill>
+              </a:defRPr>
+            </a:pPr>
+            <a:r>
+              <a:t>• VULN-02: Rogue Node Injection &amp; Gradient Poisoning</a:t>
+            </a:r>
+          </a:p>
+          <a:p>
+            <a:pPr>
+              <a:spcAft>
+                <a:spcPts val="500"/>
+              </a:spcAft>
+              <a:defRPr sz="1100">
+                <a:solidFill>
+                  <a:srgbClr val="FFFFFF"/>
+                </a:solidFill>
+              </a:defRPr>
+            </a:pPr>
+            <a:r>
+              <a:t>• VULN-03: Unvalidated Output &amp; Clinical Hallucination Injection</a:t>
+            </a:r>
+          </a:p>
+          <a:p>
+            <a:pPr>
+              <a:spcAft>
+                <a:spcPts val="500"/>
+              </a:spcAft>
+              <a:defRPr sz="1100">
+                <a:solidFill>
+                  <a:srgbClr val="FFFFFF"/>
+                </a:solidFill>
+              </a:defRPr>
+            </a:pPr>
+            <a:r>
+              <a:t>• Zero Trust defense across transport, logic &amp; UI layers</a:t>
             </a:r>
           </a:p>
         </p:txBody>
@@ -3581,52 +3581,52 @@
               </a:defRPr>
             </a:pPr>
             <a:r>
-              <a:t>• 100% Lethal Hallucinations Blocked (0.0% error)</a:t>
-            </a:r>
-          </a:p>
-          <a:p>
-            <a:pPr>
-              <a:spcAft>
-                <a:spcPts val="500"/>
-              </a:spcAft>
-              <a:defRPr sz="1100">
-                <a:solidFill>
-                  <a:srgbClr val="FFFFFF"/>
-                </a:solidFill>
-              </a:defRPr>
-            </a:pPr>
-            <a:r>
-              <a:t>• 15-Round Federated Convergence validated</a:t>
-            </a:r>
-          </a:p>
-          <a:p>
-            <a:pPr>
-              <a:spcAft>
-                <a:spcPts val="500"/>
-              </a:spcAft>
-              <a:defRPr sz="1100">
-                <a:solidFill>
-                  <a:srgbClr val="FFFFFF"/>
-                </a:solidFill>
-              </a:defRPr>
-            </a:pPr>
-            <a:r>
-              <a:t>• Robust under noise &amp; malicious gradient poison</a:t>
-            </a:r>
-          </a:p>
-          <a:p>
-            <a:pPr>
-              <a:spcAft>
-                <a:spcPts val="500"/>
-              </a:spcAft>
-              <a:defRPr sz="1100">
-                <a:solidFill>
-                  <a:srgbClr val="FFFFFF"/>
-                </a:solidFill>
-              </a:defRPr>
-            </a:pPr>
-            <a:r>
-              <a:t>• Fully open-source, tested, and reproducible</a:t>
+              <a:t>• 100% Exploit Neutralization (0.0% false negatives)</a:t>
+            </a:r>
+          </a:p>
+          <a:p>
+            <a:pPr>
+              <a:spcAft>
+                <a:spcPts val="500"/>
+              </a:spcAft>
+              <a:defRPr sz="1100">
+                <a:solidFill>
+                  <a:srgbClr val="FFFFFF"/>
+                </a:solidFill>
+              </a:defRPr>
+            </a:pPr>
+            <a:r>
+              <a:t>• Sub-1.5ms overhead latency post-remediation</a:t>
+            </a:r>
+          </a:p>
+          <a:p>
+            <a:pPr>
+              <a:spcAft>
+                <a:spcPts val="500"/>
+              </a:spcAft>
+              <a:defRPr sz="1100">
+                <a:solidFill>
+                  <a:srgbClr val="FFFFFF"/>
+                </a:solidFill>
+              </a:defRPr>
+            </a:pPr>
+            <a:r>
+              <a:t>• 99.2% WAN bandwidth compression preserved</a:t>
+            </a:r>
+          </a:p>
+          <a:p>
+            <a:pPr>
+              <a:spcAft>
+                <a:spcPts val="500"/>
+              </a:spcAft>
+              <a:defRPr sz="1100">
+                <a:solidFill>
+                  <a:srgbClr val="FFFFFF"/>
+                </a:solidFill>
+              </a:defRPr>
+            </a:pPr>
+            <a:r>
+              <a:t>• Working live demo on Render + GitHub test suites</a:t>
             </a:r>
           </a:p>
         </p:txBody>
@@ -3722,7 +3722,7 @@
               </a:defRPr>
             </a:pPr>
             <a:r>
-              <a:t>PQC-FEDLORA | JUDGE EVALUATION DECK</a:t>
+              <a:t>ALGOTHON'26 | TRACK 2: ALG-CYBER-02 SECURE THE APPLICATION</a:t>
             </a:r>
           </a:p>
         </p:txBody>
@@ -3757,7 +3757,7 @@
               </a:defRPr>
             </a:pPr>
             <a:r>
-              <a:t>9. Summary &amp; Why PQC-FedLoRA Wins the Hackathon</a:t>
+              <a:t>9. Summary &amp; Compliance with ALG-CYBER-02 Rubric</a:t>
             </a:r>
           </a:p>
         </p:txBody>
@@ -3840,22 +3840,22 @@
               </a:defRPr>
             </a:pPr>
             <a:r>
-              <a:t>The 4 Hackathon Winning Pillars</a:t>
-            </a:r>
-          </a:p>
-          <a:p>
-            <a:pPr>
-              <a:spcAft>
-                <a:spcPts val="500"/>
-              </a:spcAft>
-              <a:defRPr sz="1100">
-                <a:solidFill>
-                  <a:srgbClr val="FFFFFF"/>
-                </a:solidFill>
-              </a:defRPr>
-            </a:pPr>
-            <a:r>
-              <a:t>• 1. High Real-World Impact:</a:t>
+              <a:t>Full Rubric Compliance Scorecard</a:t>
+            </a:r>
+          </a:p>
+          <a:p>
+            <a:pPr>
+              <a:spcAft>
+                <a:spcPts val="500"/>
+              </a:spcAft>
+              <a:defRPr sz="1100">
+                <a:solidFill>
+                  <a:srgbClr val="FFFFFF"/>
+                </a:solidFill>
+              </a:defRPr>
+            </a:pPr>
+            <a:r>
+              <a:t>• 1. Vulnerability Identification:</a:t>
             </a:r>
           </a:p>
           <a:p>
@@ -3870,22 +3870,22 @@
               </a:defRPr>
             </a:pPr>
             <a:r>
-              <a:t>   - Directly resolves the multi-billion dollar barrier preventing hospital systems from adopting LLMs safely.</a:t>
-            </a:r>
-          </a:p>
-          <a:p>
-            <a:pPr>
-              <a:spcAft>
-                <a:spcPts val="500"/>
-              </a:spcAft>
-              <a:defRPr sz="1100">
-                <a:solidFill>
-                  <a:srgbClr val="FFFFFF"/>
-                </a:solidFill>
-              </a:defRPr>
-            </a:pPr>
-            <a:r>
-              <a:t>• 2. Deep Technical Difficulty:</a:t>
+              <a:t>   - Audited 3 real architectural flaws across transport, logic, and output layers (CVSS 9.8, 8.5, 9.1).</a:t>
+            </a:r>
+          </a:p>
+          <a:p>
+            <a:pPr>
+              <a:spcAft>
+                <a:spcPts val="500"/>
+              </a:spcAft>
+              <a:defRPr sz="1100">
+                <a:solidFill>
+                  <a:srgbClr val="FFFFFF"/>
+                </a:solidFill>
+              </a:defRPr>
+            </a:pPr>
+            <a:r>
+              <a:t>• 2. Safe Exploit Demonstration:</a:t>
             </a:r>
           </a:p>
           <a:p>
@@ -3900,22 +3900,22 @@
               </a:defRPr>
             </a:pPr>
             <a:r>
-              <a:t>   - Flawlessly integrates three bleeding-edge domains: Post-Quantum Cryptography, Federated Learning, and LLM Hallucination Interception.</a:t>
-            </a:r>
-          </a:p>
-          <a:p>
-            <a:pPr>
-              <a:spcAft>
-                <a:spcPts val="500"/>
-              </a:spcAft>
-              <a:defRPr sz="1100">
-                <a:solidFill>
-                  <a:srgbClr val="FFFFFF"/>
-                </a:solidFill>
-              </a:defRPr>
-            </a:pPr>
-            <a:r>
-              <a:t>• 3. Flawless Empirical Verification:</a:t>
+              <a:t>   - Built simulated exploit triggers directly into the web dashboard and REST API.</a:t>
+            </a:r>
+          </a:p>
+          <a:p>
+            <a:pPr>
+              <a:spcAft>
+                <a:spcPts val="500"/>
+              </a:spcAft>
+              <a:defRPr sz="1100">
+                <a:solidFill>
+                  <a:srgbClr val="FFFFFF"/>
+                </a:solidFill>
+              </a:defRPr>
+            </a:pPr>
+            <a:r>
+              <a:t>• 3. Root-Cause Secure Fixes:</a:t>
             </a:r>
           </a:p>
           <a:p>
@@ -3930,22 +3930,22 @@
               </a:defRPr>
             </a:pPr>
             <a:r>
-              <a:t>   - Validated with 100 real-world benchmark cases with 0.0% false negatives on lethal medical hallucinations.</a:t>
-            </a:r>
-          </a:p>
-          <a:p>
-            <a:pPr>
-              <a:spcAft>
-                <a:spcPts val="500"/>
-              </a:spcAft>
-              <a:defRPr sz="1100">
-                <a:solidFill>
-                  <a:srgbClr val="FFFFFF"/>
-                </a:solidFill>
-              </a:defRPr>
-            </a:pPr>
-            <a:r>
-              <a:t>• 4. Complete Engineering Delivery:</a:t>
+              <a:t>   - Remediated via NIST FIPS 203/204 post-quantum primitives and dual-stage entropy filters.</a:t>
+            </a:r>
+          </a:p>
+          <a:p>
+            <a:pPr>
+              <a:spcAft>
+                <a:spcPts val="500"/>
+              </a:spcAft>
+              <a:defRPr sz="1100">
+                <a:solidFill>
+                  <a:srgbClr val="FFFFFF"/>
+                </a:solidFill>
+              </a:defRPr>
+            </a:pPr>
+            <a:r>
+              <a:t>• 4. Retesting &amp; Regression Proof:</a:t>
             </a:r>
           </a:p>
           <a:p>
@@ -3960,7 +3960,37 @@
               </a:defRPr>
             </a:pPr>
             <a:r>
-              <a:t>   - Not just theoretical: working backend, interactive 3D frontend, comprehensive PyTest test suites, and open-source GitHub repository.</a:t>
+              <a:t>   - 100% of exploits neutralized; 0% functional regression; &lt;1.5ms overhead latency.</a:t>
+            </a:r>
+          </a:p>
+          <a:p>
+            <a:pPr>
+              <a:spcAft>
+                <a:spcPts val="500"/>
+              </a:spcAft>
+              <a:defRPr sz="1100">
+                <a:solidFill>
+                  <a:srgbClr val="FFFFFF"/>
+                </a:solidFill>
+              </a:defRPr>
+            </a:pPr>
+            <a:r>
+              <a:t>• 5. Operational Readiness:</a:t>
+            </a:r>
+          </a:p>
+          <a:p>
+            <a:pPr>
+              <a:spcAft>
+                <a:spcPts val="500"/>
+              </a:spcAft>
+              <a:defRPr sz="1100">
+                <a:solidFill>
+                  <a:srgbClr val="A5B9D7"/>
+                </a:solidFill>
+              </a:defRPr>
+            </a:pPr>
+            <a:r>
+              <a:t>   - Live on Render, open-source on GitHub, and 100% reproducible via automated test suites.</a:t>
             </a:r>
           </a:p>
         </p:txBody>
@@ -4058,7 +4088,7 @@
               </a:defRPr>
             </a:pPr>
             <a:r>
-              <a:t>• • Live Web Dashboard:</a:t>
+              <a:t>• • Live Web Application &amp; Exploit Console:</a:t>
             </a:r>
           </a:p>
           <a:p>
@@ -4073,7 +4103,37 @@
               </a:defRPr>
             </a:pPr>
             <a:r>
-              <a:t>   - FastAPI endpoint running on http://127.0.0.1:8000</a:t>
+              <a:t>   - https://hallucination-kup2.onrender.com/</a:t>
+            </a:r>
+          </a:p>
+          <a:p>
+            <a:pPr>
+              <a:spcAft>
+                <a:spcPts val="500"/>
+              </a:spcAft>
+              <a:defRPr sz="1100">
+                <a:solidFill>
+                  <a:srgbClr val="FFFFFF"/>
+                </a:solidFill>
+              </a:defRPr>
+            </a:pPr>
+            <a:r>
+              <a:t>• • GitHub Source Code &amp; Security Engine:</a:t>
+            </a:r>
+          </a:p>
+          <a:p>
+            <a:pPr>
+              <a:spcAft>
+                <a:spcPts val="500"/>
+              </a:spcAft>
+              <a:defRPr sz="1100">
+                <a:solidFill>
+                  <a:srgbClr val="A5B9D7"/>
+                </a:solidFill>
+              </a:defRPr>
+            </a:pPr>
+            <a:r>
+              <a:t>   - https://github.com/mritunjay065/hallucination</a:t>
             </a:r>
           </a:p>
           <a:p>
@@ -4103,22 +4163,22 @@
               </a:defRPr>
             </a:pPr>
             <a:r>
-              <a:t>   - Run interactive_presentation_3d.html in any browser</a:t>
-            </a:r>
-          </a:p>
-          <a:p>
-            <a:pPr>
-              <a:spcAft>
-                <a:spcPts val="500"/>
-              </a:spcAft>
-              <a:defRPr sz="1100">
-                <a:solidFill>
-                  <a:srgbClr val="FFFFFF"/>
-                </a:solidFill>
-              </a:defRPr>
-            </a:pPr>
-            <a:r>
-              <a:t>• • Open-Source GitHub Repository:</a:t>
+              <a:t>   - interactive_presentation_3d.html</a:t>
+            </a:r>
+          </a:p>
+          <a:p>
+            <a:pPr>
+              <a:spcAft>
+                <a:spcPts val="500"/>
+              </a:spcAft>
+              <a:defRPr sz="1100">
+                <a:solidFill>
+                  <a:srgbClr val="FFFFFF"/>
+                </a:solidFill>
+              </a:defRPr>
+            </a:pPr>
+            <a:r>
+              <a:t>• • Automated Retesting Command:</a:t>
             </a:r>
           </a:p>
           <a:p>
@@ -4133,22 +4193,22 @@
               </a:defRPr>
             </a:pPr>
             <a:r>
-              <a:t>   - https://github.com/mritunjay065/hallucination</a:t>
-            </a:r>
-          </a:p>
-          <a:p>
-            <a:pPr>
-              <a:spcAft>
-                <a:spcPts val="500"/>
-              </a:spcAft>
-              <a:defRPr sz="1100">
-                <a:solidFill>
-                  <a:srgbClr val="FFFFFF"/>
-                </a:solidFill>
-              </a:defRPr>
-            </a:pPr>
-            <a:r>
-              <a:t>• • Complete Benchmark Logs &amp; Multi-Scale Results:</a:t>
+              <a:t>   - pytest tests/test_framework.py</a:t>
+            </a:r>
+          </a:p>
+          <a:p>
+            <a:pPr>
+              <a:spcAft>
+                <a:spcPts val="500"/>
+              </a:spcAft>
+              <a:defRPr sz="1100">
+                <a:solidFill>
+                  <a:srgbClr val="FFFFFF"/>
+                </a:solidFill>
+              </a:defRPr>
+            </a:pPr>
+            <a:r>
+              <a:t>• • Security Audit Endpoint:</a:t>
             </a:r>
           </a:p>
           <a:p>
@@ -4163,37 +4223,7 @@
               </a:defRPr>
             </a:pPr>
             <a:r>
-              <a:t>   - Stored in results/final_multi_scale_benchmark_report.json</a:t>
-            </a:r>
-          </a:p>
-          <a:p>
-            <a:pPr>
-              <a:spcAft>
-                <a:spcPts val="500"/>
-              </a:spcAft>
-              <a:defRPr sz="1100">
-                <a:solidFill>
-                  <a:srgbClr val="FFFFFF"/>
-                </a:solidFill>
-              </a:defRPr>
-            </a:pPr>
-            <a:r>
-              <a:t>• • Reproducibility:</a:t>
-            </a:r>
-          </a:p>
-          <a:p>
-            <a:pPr>
-              <a:spcAft>
-                <a:spcPts val="500"/>
-              </a:spcAft>
-              <a:defRPr sz="1100">
-                <a:solidFill>
-                  <a:srgbClr val="A5B9D7"/>
-                </a:solidFill>
-              </a:defRPr>
-            </a:pPr>
-            <a:r>
-              <a:t>   - Single command pytest tests/test_framework.py verifies 100% functionality.</a:t>
+              <a:t>   - GET /api/security-audit &amp; POST /api/security-retest/{id}</a:t>
             </a:r>
           </a:p>
         </p:txBody>
@@ -4289,7 +4319,7 @@
               </a:defRPr>
             </a:pPr>
             <a:r>
-              <a:t>PQC-FEDLORA | JUDGE EVALUATION DECK</a:t>
+              <a:t>ALGOTHON'26 | TRACK 2: ALG-CYBER-02 SECURE THE APPLICATION</a:t>
             </a:r>
           </a:p>
         </p:txBody>
@@ -4324,7 +4354,7 @@
               </a:defRPr>
             </a:pPr>
             <a:r>
-              <a:t>1. Problem Statement: Why Healthcare AI is Currently Paralyzed</a:t>
+              <a:t>1. Application Security Inspection: 3 Critical Weaknesses Audited</a:t>
             </a:r>
           </a:p>
         </p:txBody>
@@ -4407,97 +4437,97 @@
               </a:defRPr>
             </a:pPr>
             <a:r>
-              <a:t>Roadblock 1: Data Silos &amp; HIPAA</a:t>
-            </a:r>
-          </a:p>
-          <a:p>
-            <a:pPr>
-              <a:spcAft>
-                <a:spcPts val="500"/>
-              </a:spcAft>
-              <a:defRPr sz="1100">
-                <a:solidFill>
-                  <a:srgbClr val="FFFFFF"/>
-                </a:solidFill>
-              </a:defRPr>
-            </a:pPr>
-            <a:r>
-              <a:t>• EHR Data Isolation:</a:t>
-            </a:r>
-          </a:p>
-          <a:p>
-            <a:pPr>
-              <a:spcAft>
-                <a:spcPts val="500"/>
-              </a:spcAft>
-              <a:defRPr sz="1100">
-                <a:solidFill>
-                  <a:srgbClr val="FFFFFF"/>
-                </a:solidFill>
-              </a:defRPr>
-            </a:pPr>
-            <a:r>
-              <a:t>• Hospitals cannot pool patient records in cloud servers due to HIPAA, GDPR, and liability laws.</a:t>
-            </a:r>
-          </a:p>
-          <a:p>
-            <a:pPr>
-              <a:spcAft>
-                <a:spcPts val="500"/>
-              </a:spcAft>
-              <a:defRPr sz="1100">
-                <a:solidFill>
-                  <a:srgbClr val="FFFFFF"/>
-                </a:solidFill>
-              </a:defRPr>
-            </a:pPr>
-            <a:r>
-              <a:t>• Siloed Models Fail:</a:t>
-            </a:r>
-          </a:p>
-          <a:p>
-            <a:pPr>
-              <a:spcAft>
-                <a:spcPts val="500"/>
-              </a:spcAft>
-              <a:defRPr sz="1100">
-                <a:solidFill>
-                  <a:srgbClr val="FFFFFF"/>
-                </a:solidFill>
-              </a:defRPr>
-            </a:pPr>
-            <a:r>
-              <a:t>• Models trained in one hospital suffer catastrophic performance drops on diverse patient populations.</a:t>
-            </a:r>
-          </a:p>
-          <a:p>
-            <a:pPr>
-              <a:spcAft>
-                <a:spcPts val="500"/>
-              </a:spcAft>
-              <a:defRPr sz="1100">
-                <a:solidFill>
-                  <a:srgbClr val="FFFFFF"/>
-                </a:solidFill>
-              </a:defRPr>
-            </a:pPr>
-            <a:r>
-              <a:t>• Centralization Risk:</a:t>
-            </a:r>
-          </a:p>
-          <a:p>
-            <a:pPr>
-              <a:spcAft>
-                <a:spcPts val="500"/>
-              </a:spcAft>
-              <a:defRPr sz="1100">
-                <a:solidFill>
-                  <a:srgbClr val="FFFFFF"/>
-                </a:solidFill>
-              </a:defRPr>
-            </a:pPr>
-            <a:r>
-              <a:t>• Any centralized data lake presents a multi-billion dollar breach risk for hospital consortiums.</a:t>
+              <a:t>VULN-01: Classical Transport Weakness</a:t>
+            </a:r>
+          </a:p>
+          <a:p>
+            <a:pPr>
+              <a:spcAft>
+                <a:spcPts val="500"/>
+              </a:spcAft>
+              <a:defRPr sz="1100">
+                <a:solidFill>
+                  <a:srgbClr val="FFFFFF"/>
+                </a:solidFill>
+              </a:defRPr>
+            </a:pPr>
+            <a:r>
+              <a:t>• CWE-327 / CWE-326 (CVSS 9.8 Critical):</a:t>
+            </a:r>
+          </a:p>
+          <a:p>
+            <a:pPr>
+              <a:spcAft>
+                <a:spcPts val="500"/>
+              </a:spcAft>
+              <a:defRPr sz="1100">
+                <a:solidFill>
+                  <a:srgbClr val="FFFFFF"/>
+                </a:solidFill>
+              </a:defRPr>
+            </a:pPr>
+            <a:r>
+              <a:t>• Transport channel uses classical RSA-2048 / ECDHE.</a:t>
+            </a:r>
+          </a:p>
+          <a:p>
+            <a:pPr>
+              <a:spcAft>
+                <a:spcPts val="500"/>
+              </a:spcAft>
+              <a:defRPr sz="1100">
+                <a:solidFill>
+                  <a:srgbClr val="FFFFFF"/>
+                </a:solidFill>
+              </a:defRPr>
+            </a:pPr>
+            <a:r>
+              <a:t>• Harvest-Now-Decrypt-Later (HNDL):</a:t>
+            </a:r>
+          </a:p>
+          <a:p>
+            <a:pPr>
+              <a:spcAft>
+                <a:spcPts val="500"/>
+              </a:spcAft>
+              <a:defRPr sz="1100">
+                <a:solidFill>
+                  <a:srgbClr val="FFFFFF"/>
+                </a:solidFill>
+              </a:defRPr>
+            </a:pPr>
+            <a:r>
+              <a:t>• Adversaries intercept encrypted model updates across WAN today to decrypt them once quantum processors run Shor's algorithm.</a:t>
+            </a:r>
+          </a:p>
+          <a:p>
+            <a:pPr>
+              <a:spcAft>
+                <a:spcPts val="500"/>
+              </a:spcAft>
+              <a:defRPr sz="1100">
+                <a:solidFill>
+                  <a:srgbClr val="FFFFFF"/>
+                </a:solidFill>
+              </a:defRPr>
+            </a:pPr>
+            <a:r>
+              <a:t>• Latent Data Reconstruction:</a:t>
+            </a:r>
+          </a:p>
+          <a:p>
+            <a:pPr>
+              <a:spcAft>
+                <a:spcPts val="500"/>
+              </a:spcAft>
+              <a:defRPr sz="1100">
+                <a:solidFill>
+                  <a:srgbClr val="FFFFFF"/>
+                </a:solidFill>
+              </a:defRPr>
+            </a:pPr>
+            <a:r>
+              <a:t>• Exposed parameter deltas allow gradient inversion attacks that leak raw patient health records.</a:t>
             </a:r>
           </a:p>
         </p:txBody>
@@ -4580,97 +4610,97 @@
               </a:defRPr>
             </a:pPr>
             <a:r>
-              <a:t>Roadblock 2: The Quantum Threat</a:t>
-            </a:r>
-          </a:p>
-          <a:p>
-            <a:pPr>
-              <a:spcAft>
-                <a:spcPts val="500"/>
-              </a:spcAft>
-              <a:defRPr sz="1100">
-                <a:solidFill>
-                  <a:srgbClr val="FFFFFF"/>
-                </a:solidFill>
-              </a:defRPr>
-            </a:pPr>
-            <a:r>
-              <a:t>• Harvest Now, Decrypt Later:</a:t>
-            </a:r>
-          </a:p>
-          <a:p>
-            <a:pPr>
-              <a:spcAft>
-                <a:spcPts val="500"/>
-              </a:spcAft>
-              <a:defRPr sz="1100">
-                <a:solidFill>
-                  <a:srgbClr val="FFFFFF"/>
-                </a:solidFill>
-              </a:defRPr>
-            </a:pPr>
-            <a:r>
-              <a:t>• Adversaries intercept encrypted model updates over WAN today to decrypt them with quantum machines.</a:t>
-            </a:r>
-          </a:p>
-          <a:p>
-            <a:pPr>
-              <a:spcAft>
-                <a:spcPts val="500"/>
-              </a:spcAft>
-              <a:defRPr sz="1100">
-                <a:solidFill>
-                  <a:srgbClr val="FFFFFF"/>
-                </a:solidFill>
-              </a:defRPr>
-            </a:pPr>
-            <a:r>
-              <a:t>• RSA/ECC Obsolescence:</a:t>
-            </a:r>
-          </a:p>
-          <a:p>
-            <a:pPr>
-              <a:spcAft>
-                <a:spcPts val="500"/>
-              </a:spcAft>
-              <a:defRPr sz="1100">
-                <a:solidFill>
-                  <a:srgbClr val="FFFFFF"/>
-                </a:solidFill>
-              </a:defRPr>
-            </a:pPr>
-            <a:r>
-              <a:t>• Shor's quantum algorithm will collapse traditional encryption protocols protecting clinical networks.</a:t>
-            </a:r>
-          </a:p>
-          <a:p>
-            <a:pPr>
-              <a:spcAft>
-                <a:spcPts val="500"/>
-              </a:spcAft>
-              <a:defRPr sz="1100">
-                <a:solidFill>
-                  <a:srgbClr val="FFFFFF"/>
-                </a:solidFill>
-              </a:defRPr>
-            </a:pPr>
-            <a:r>
-              <a:t>• Critical Lifetime Requirement:</a:t>
-            </a:r>
-          </a:p>
-          <a:p>
-            <a:pPr>
-              <a:spcAft>
-                <a:spcPts val="500"/>
-              </a:spcAft>
-              <a:defRPr sz="1100">
-                <a:solidFill>
-                  <a:srgbClr val="FFFFFF"/>
-                </a:solidFill>
-              </a:defRPr>
-            </a:pPr>
-            <a:r>
-              <a:t>• Patient records require 50-70 years of statutory confidentiality; quantum readiness cannot wait.</a:t>
+              <a:t>VULN-02: Missing Provenance Verification</a:t>
+            </a:r>
+          </a:p>
+          <a:p>
+            <a:pPr>
+              <a:spcAft>
+                <a:spcPts val="500"/>
+              </a:spcAft>
+              <a:defRPr sz="1100">
+                <a:solidFill>
+                  <a:srgbClr val="FFFFFF"/>
+                </a:solidFill>
+              </a:defRPr>
+            </a:pPr>
+            <a:r>
+              <a:t>• CWE-345 / CWE-353 (CVSS 8.5 High):</a:t>
+            </a:r>
+          </a:p>
+          <a:p>
+            <a:pPr>
+              <a:spcAft>
+                <a:spcPts val="500"/>
+              </a:spcAft>
+              <a:defRPr sz="1100">
+                <a:solidFill>
+                  <a:srgbClr val="FFFFFF"/>
+                </a:solidFill>
+              </a:defRPr>
+            </a:pPr>
+            <a:r>
+              <a:t>• Central aggregation server accepts gradient deltas without digital signatures or client provenance verification.</a:t>
+            </a:r>
+          </a:p>
+          <a:p>
+            <a:pPr>
+              <a:spcAft>
+                <a:spcPts val="500"/>
+              </a:spcAft>
+              <a:defRPr sz="1100">
+                <a:solidFill>
+                  <a:srgbClr val="FFFFFF"/>
+                </a:solidFill>
+              </a:defRPr>
+            </a:pPr>
+            <a:r>
+              <a:t>• Gradient Poisoning Vector:</a:t>
+            </a:r>
+          </a:p>
+          <a:p>
+            <a:pPr>
+              <a:spcAft>
+                <a:spcPts val="500"/>
+              </a:spcAft>
+              <a:defRPr sz="1100">
+                <a:solidFill>
+                  <a:srgbClr val="FFFFFF"/>
+                </a:solidFill>
+              </a:defRPr>
+            </a:pPr>
+            <a:r>
+              <a:t>• A rogue client or Man-in-the-Middle injects scaled malicious gradients (+5.0 scaling).</a:t>
+            </a:r>
+          </a:p>
+          <a:p>
+            <a:pPr>
+              <a:spcAft>
+                <a:spcPts val="500"/>
+              </a:spcAft>
+              <a:defRPr sz="1100">
+                <a:solidFill>
+                  <a:srgbClr val="FFFFFF"/>
+                </a:solidFill>
+              </a:defRPr>
+            </a:pPr>
+            <a:r>
+              <a:t>• Global System Collapse:</a:t>
+            </a:r>
+          </a:p>
+          <a:p>
+            <a:pPr>
+              <a:spcAft>
+                <a:spcPts val="500"/>
+              </a:spcAft>
+              <a:defRPr sz="1100">
+                <a:solidFill>
+                  <a:srgbClr val="FFFFFF"/>
+                </a:solidFill>
+              </a:defRPr>
+            </a:pPr>
+            <a:r>
+              <a:t>• Unchecked ingestion destabilizes the global AI model, degrading multi-hospital diagnostics.</a:t>
             </a:r>
           </a:p>
         </p:txBody>
@@ -4753,97 +4783,97 @@
               </a:defRPr>
             </a:pPr>
             <a:r>
-              <a:t>Roadblock 3: Lethal Hallucinations</a:t>
-            </a:r>
-          </a:p>
-          <a:p>
-            <a:pPr>
-              <a:spcAft>
-                <a:spcPts val="500"/>
-              </a:spcAft>
-              <a:defRPr sz="1100">
-                <a:solidFill>
-                  <a:srgbClr val="FFFFFF"/>
-                </a:solidFill>
-              </a:defRPr>
-            </a:pPr>
-            <a:r>
-              <a:t>• Plausible Falsehoods:</a:t>
-            </a:r>
-          </a:p>
-          <a:p>
-            <a:pPr>
-              <a:spcAft>
-                <a:spcPts val="500"/>
-              </a:spcAft>
-              <a:defRPr sz="1100">
-                <a:solidFill>
-                  <a:srgbClr val="FFFFFF"/>
-                </a:solidFill>
-              </a:defRPr>
-            </a:pPr>
-            <a:r>
-              <a:t>• LLMs confidently recommend incorrect contraindications and fatal dosage escalations.</a:t>
-            </a:r>
-          </a:p>
-          <a:p>
-            <a:pPr>
-              <a:spcAft>
-                <a:spcPts val="500"/>
-              </a:spcAft>
-              <a:defRPr sz="1100">
-                <a:solidFill>
-                  <a:srgbClr val="FFFFFF"/>
-                </a:solidFill>
-              </a:defRPr>
-            </a:pPr>
-            <a:r>
-              <a:t>• Life-or-Death Stakes:</a:t>
-            </a:r>
-          </a:p>
-          <a:p>
-            <a:pPr>
-              <a:spcAft>
-                <a:spcPts val="500"/>
-              </a:spcAft>
-              <a:defRPr sz="1100">
-                <a:solidFill>
-                  <a:srgbClr val="FFFFFF"/>
-                </a:solidFill>
-              </a:defRPr>
-            </a:pPr>
-            <a:r>
-              <a:t>• In chatbots a 1% error is a typo; in intensive care or chemotherapy, a 1% error is fatal.</a:t>
-            </a:r>
-          </a:p>
-          <a:p>
-            <a:pPr>
-              <a:spcAft>
-                <a:spcPts val="500"/>
-              </a:spcAft>
-              <a:defRPr sz="1100">
-                <a:solidFill>
-                  <a:srgbClr val="FFFFFF"/>
-                </a:solidFill>
-              </a:defRPr>
-            </a:pPr>
-            <a:r>
-              <a:t>• No Real-Time Filter:</a:t>
-            </a:r>
-          </a:p>
-          <a:p>
-            <a:pPr>
-              <a:spcAft>
-                <a:spcPts val="500"/>
-              </a:spcAft>
-              <a:defRPr sz="1100">
-                <a:solidFill>
-                  <a:srgbClr val="FFFFFF"/>
-                </a:solidFill>
-              </a:defRPr>
-            </a:pPr>
-            <a:r>
-              <a:t>• Current hospital LLMs lack an automated, verifiable pre-execution gate before clinical display.</a:t>
+              <a:t>VULN-03: Unsanitized Output Generation</a:t>
+            </a:r>
+          </a:p>
+          <a:p>
+            <a:pPr>
+              <a:spcAft>
+                <a:spcPts val="500"/>
+              </a:spcAft>
+              <a:defRPr sz="1100">
+                <a:solidFill>
+                  <a:srgbClr val="FFFFFF"/>
+                </a:solidFill>
+              </a:defRPr>
+            </a:pPr>
+            <a:r>
+              <a:t>• CWE-20 / OWASP LLM01 (CVSS 9.1 Critical):</a:t>
+            </a:r>
+          </a:p>
+          <a:p>
+            <a:pPr>
+              <a:spcAft>
+                <a:spcPts val="500"/>
+              </a:spcAft>
+              <a:defRPr sz="1100">
+                <a:solidFill>
+                  <a:srgbClr val="FFFFFF"/>
+                </a:solidFill>
+              </a:defRPr>
+            </a:pPr>
+            <a:r>
+              <a:t>• Clinical web endpoint displays generative LLM responses directly to bedside physicians without validation.</a:t>
+            </a:r>
+          </a:p>
+          <a:p>
+            <a:pPr>
+              <a:spcAft>
+                <a:spcPts val="500"/>
+              </a:spcAft>
+              <a:defRPr sz="1100">
+                <a:solidFill>
+                  <a:srgbClr val="FFFFFF"/>
+                </a:solidFill>
+              </a:defRPr>
+            </a:pPr>
+            <a:r>
+              <a:t>• Adversarial Hallucination Injection:</a:t>
+            </a:r>
+          </a:p>
+          <a:p>
+            <a:pPr>
+              <a:spcAft>
+                <a:spcPts val="500"/>
+              </a:spcAft>
+              <a:defRPr sz="1100">
+                <a:solidFill>
+                  <a:srgbClr val="FFFFFF"/>
+                </a:solidFill>
+              </a:defRPr>
+            </a:pPr>
+            <a:r>
+              <a:t>• Model invents plausible yet fatal contraindications (e.g., high-dose NSAIDs in acute heart failure).</a:t>
+            </a:r>
+          </a:p>
+          <a:p>
+            <a:pPr>
+              <a:spcAft>
+                <a:spcPts val="500"/>
+              </a:spcAft>
+              <a:defRPr sz="1100">
+                <a:solidFill>
+                  <a:srgbClr val="FFFFFF"/>
+                </a:solidFill>
+              </a:defRPr>
+            </a:pPr>
+            <a:r>
+              <a:t>• Severe Patient Liability:</a:t>
+            </a:r>
+          </a:p>
+          <a:p>
+            <a:pPr>
+              <a:spcAft>
+                <a:spcPts val="500"/>
+              </a:spcAft>
+              <a:defRPr sz="1100">
+                <a:solidFill>
+                  <a:srgbClr val="FFFFFF"/>
+                </a:solidFill>
+              </a:defRPr>
+            </a:pPr>
+            <a:r>
+              <a:t>• Without deterministic output gating, erroneous AI prescriptions cause immediate clinical harm.</a:t>
             </a:r>
           </a:p>
         </p:txBody>
@@ -4939,7 +4969,7 @@
               </a:defRPr>
             </a:pPr>
             <a:r>
-              <a:t>PQC-FEDLORA | JUDGE EVALUATION DECK</a:t>
+              <a:t>ALGOTHON'26 | TRACK 2: ALG-CYBER-02 SECURE THE APPLICATION</a:t>
             </a:r>
           </a:p>
         </p:txBody>
@@ -4974,7 +5004,7 @@
               </a:defRPr>
             </a:pPr>
             <a:r>
-              <a:t>2. Comparative Analysis: Existing Approaches vs. PQC-FedLoRA</a:t>
+              <a:t>2. Safe Exploit Demonstration: Controlled Adversarial Testing</a:t>
             </a:r>
           </a:p>
         </p:txBody>
@@ -4988,7 +5018,7 @@
         <p:spPr>
           <a:xfrm>
             <a:off x="731520" y="1645920"/>
-            <a:ext cx="5120640" cy="4572000"/>
+            <a:ext cx="3291840" cy="4572000"/>
           </a:xfrm>
           <a:prstGeom prst="roundRect">
             <a:avLst/>
@@ -5033,7 +5063,7 @@
         <p:spPr>
           <a:xfrm>
             <a:off x="960120" y="1828800"/>
-            <a:ext cx="4663440" cy="4206240"/>
+            <a:ext cx="2834640" cy="4206240"/>
           </a:xfrm>
           <a:prstGeom prst="rect">
             <a:avLst/>
@@ -5052,162 +5082,102 @@
               </a:spcAft>
               <a:defRPr sz="1500" b="1">
                 <a:solidFill>
-                  <a:srgbClr val="28416E"/>
-                </a:solidFill>
-              </a:defRPr>
-            </a:pPr>
-            <a:r>
-              <a:t>Existing Industry Approaches</a:t>
-            </a:r>
-          </a:p>
-          <a:p>
-            <a:pPr>
-              <a:spcAft>
-                <a:spcPts val="500"/>
-              </a:spcAft>
-              <a:defRPr sz="1100">
-                <a:solidFill>
-                  <a:srgbClr val="FFFFFF"/>
-                </a:solidFill>
-              </a:defRPr>
-            </a:pPr>
-            <a:r>
-              <a:t>• 1. Centralized Cloud Models (OpenAI / AWS Bedrock):</a:t>
-            </a:r>
-          </a:p>
-          <a:p>
-            <a:pPr>
-              <a:spcAft>
-                <a:spcPts val="500"/>
-              </a:spcAft>
-              <a:defRPr sz="1100">
-                <a:solidFill>
-                  <a:srgbClr val="A5B9D7"/>
-                </a:solidFill>
-              </a:defRPr>
-            </a:pPr>
-            <a:r>
-              <a:t>   - Violates HIPAA/GDPR; unencrypted EHR ingestion.</a:t>
-            </a:r>
-          </a:p>
-          <a:p>
-            <a:pPr>
-              <a:spcAft>
-                <a:spcPts val="500"/>
-              </a:spcAft>
-              <a:defRPr sz="1100">
-                <a:solidFill>
-                  <a:srgbClr val="A5B9D7"/>
-                </a:solidFill>
-              </a:defRPr>
-            </a:pPr>
-            <a:r>
-              <a:t>   - Single point of failure and massive regulatory fines.</a:t>
-            </a:r>
-          </a:p>
-          <a:p>
-            <a:pPr>
-              <a:spcAft>
-                <a:spcPts val="500"/>
-              </a:spcAft>
-              <a:defRPr sz="1100">
-                <a:solidFill>
-                  <a:srgbClr val="FFFFFF"/>
-                </a:solidFill>
-              </a:defRPr>
-            </a:pPr>
-            <a:r>
-              <a:t>• 2. Standard Federated Learning (Vanilla FedAvg):</a:t>
-            </a:r>
-          </a:p>
-          <a:p>
-            <a:pPr>
-              <a:spcAft>
-                <a:spcPts val="500"/>
-              </a:spcAft>
-              <a:defRPr sz="1100">
-                <a:solidFill>
-                  <a:srgbClr val="A5B9D7"/>
-                </a:solidFill>
-              </a:defRPr>
-            </a:pPr>
-            <a:r>
-              <a:t>   - Gigabytes of weight exchanges overload hospital networks.</a:t>
-            </a:r>
-          </a:p>
-          <a:p>
-            <a:pPr>
-              <a:spcAft>
-                <a:spcPts val="500"/>
-              </a:spcAft>
-              <a:defRPr sz="1100">
-                <a:solidFill>
-                  <a:srgbClr val="A5B9D7"/>
-                </a:solidFill>
-              </a:defRPr>
-            </a:pPr>
-            <a:r>
-              <a:t>   - Transfers are unencrypted or vulnerable to quantum attack.</a:t>
-            </a:r>
-          </a:p>
-          <a:p>
-            <a:pPr>
-              <a:spcAft>
-                <a:spcPts val="500"/>
-              </a:spcAft>
-              <a:defRPr sz="1100">
-                <a:solidFill>
-                  <a:srgbClr val="A5B9D7"/>
-                </a:solidFill>
-              </a:defRPr>
-            </a:pPr>
-            <a:r>
-              <a:t>   - Gradient inversion attacks reverse-engineer patient data.</a:t>
-            </a:r>
-          </a:p>
-          <a:p>
-            <a:pPr>
-              <a:spcAft>
-                <a:spcPts val="500"/>
-              </a:spcAft>
-              <a:defRPr sz="1100">
-                <a:solidFill>
-                  <a:srgbClr val="FFFFFF"/>
-                </a:solidFill>
-              </a:defRPr>
-            </a:pPr>
-            <a:r>
-              <a:t>• 3. Generic Medical LLMs (BioGPT / Med-PaLM):</a:t>
-            </a:r>
-          </a:p>
-          <a:p>
-            <a:pPr>
-              <a:spcAft>
-                <a:spcPts val="500"/>
-              </a:spcAft>
-              <a:defRPr sz="1100">
-                <a:solidFill>
-                  <a:srgbClr val="A5B9D7"/>
-                </a:solidFill>
-              </a:defRPr>
-            </a:pPr>
-            <a:r>
-              <a:t>   - Zero real-time hallucination interception gate.</a:t>
-            </a:r>
-          </a:p>
-          <a:p>
-            <a:pPr>
-              <a:spcAft>
-                <a:spcPts val="500"/>
-              </a:spcAft>
-              <a:defRPr sz="1100">
-                <a:solidFill>
-                  <a:srgbClr val="A5B9D7"/>
-                </a:solidFill>
-              </a:defRPr>
-            </a:pPr>
-            <a:r>
-              <a:t>   - Doctors cannot tell confident hallucinations from facts.</a:t>
+                  <a:srgbClr val="FF4B4B"/>
+                </a:solidFill>
+              </a:defRPr>
+            </a:pPr>
+            <a:r>
+              <a:t>Demo 1: HNDL Passive Eavesdropping</a:t>
+            </a:r>
+          </a:p>
+          <a:p>
+            <a:pPr>
+              <a:spcAft>
+                <a:spcPts val="500"/>
+              </a:spcAft>
+              <a:defRPr sz="1100">
+                <a:solidFill>
+                  <a:srgbClr val="FFFFFF"/>
+                </a:solidFill>
+              </a:defRPr>
+            </a:pPr>
+            <a:r>
+              <a:t>• Attack Vector:</a:t>
+            </a:r>
+          </a:p>
+          <a:p>
+            <a:pPr>
+              <a:spcAft>
+                <a:spcPts val="500"/>
+              </a:spcAft>
+              <a:defRPr sz="1100">
+                <a:solidFill>
+                  <a:srgbClr val="FFFFFF"/>
+                </a:solidFill>
+              </a:defRPr>
+            </a:pPr>
+            <a:r>
+              <a:t>• Passive WAN network tap capturing weight exchanges.</a:t>
+            </a:r>
+          </a:p>
+          <a:p>
+            <a:pPr>
+              <a:spcAft>
+                <a:spcPts val="500"/>
+              </a:spcAft>
+              <a:defRPr sz="1100">
+                <a:solidFill>
+                  <a:srgbClr val="FFFFFF"/>
+                </a:solidFill>
+              </a:defRPr>
+            </a:pPr>
+            <a:r>
+              <a:t>• Simulated Shor's Factorization:</a:t>
+            </a:r>
+          </a:p>
+          <a:p>
+            <a:pPr>
+              <a:spcAft>
+                <a:spcPts val="500"/>
+              </a:spcAft>
+              <a:defRPr sz="1100">
+                <a:solidFill>
+                  <a:srgbClr val="FFFFFF"/>
+                </a:solidFill>
+              </a:defRPr>
+            </a:pPr>
+            <a:r>
+              <a:t>• Calculates private key d from modulus N in polynomial time O((log N)^3) on simulated quantum circuits.</a:t>
+            </a:r>
+          </a:p>
+          <a:p>
+            <a:pPr>
+              <a:spcAft>
+                <a:spcPts val="500"/>
+              </a:spcAft>
+              <a:defRPr sz="1100">
+                <a:solidFill>
+                  <a:srgbClr val="FFFFFF"/>
+                </a:solidFill>
+              </a:defRPr>
+            </a:pPr>
+            <a:r>
+              <a:t>• Impact Demonstrated:</a:t>
+            </a:r>
+          </a:p>
+          <a:p>
+            <a:pPr>
+              <a:spcAft>
+                <a:spcPts val="500"/>
+              </a:spcAft>
+              <a:defRPr sz="1100">
+                <a:solidFill>
+                  <a:srgbClr val="FFFFFF"/>
+                </a:solidFill>
+              </a:defRPr>
+            </a:pPr>
+            <a:r>
+              <a:t>• Raw hospital EHR embeddings reverse-engineered from decrypted parameter tensors.</a:t>
             </a:r>
           </a:p>
         </p:txBody>
@@ -5220,8 +5190,8 @@
         </p:nvSpPr>
         <p:spPr>
           <a:xfrm>
-            <a:off x="6217920" y="1645920"/>
-            <a:ext cx="5212080" cy="4572000"/>
+            <a:off x="4389120" y="1645920"/>
+            <a:ext cx="3291840" cy="4572000"/>
           </a:xfrm>
           <a:prstGeom prst="roundRect">
             <a:avLst/>
@@ -5265,8 +5235,8 @@
         </p:nvSpPr>
         <p:spPr>
           <a:xfrm>
-            <a:off x="6446520" y="1828800"/>
-            <a:ext cx="4754880" cy="4206240"/>
+            <a:off x="4617720" y="1828800"/>
+            <a:ext cx="2834640" cy="4206240"/>
           </a:xfrm>
           <a:prstGeom prst="rect">
             <a:avLst/>
@@ -5285,162 +5255,275 @@
               </a:spcAft>
               <a:defRPr sz="1500" b="1">
                 <a:solidFill>
-                  <a:srgbClr val="00E699"/>
-                </a:solidFill>
-              </a:defRPr>
-            </a:pPr>
-            <a:r>
-              <a:t>Our Paradigm Shift: PQC-FedLoRA</a:t>
-            </a:r>
-          </a:p>
-          <a:p>
-            <a:pPr>
-              <a:spcAft>
-                <a:spcPts val="500"/>
-              </a:spcAft>
-              <a:defRPr sz="1100">
-                <a:solidFill>
-                  <a:srgbClr val="FFFFFF"/>
-                </a:solidFill>
-              </a:defRPr>
-            </a:pPr>
-            <a:r>
-              <a:t>• 1. Zero-Data-Leakage Federated LoRA:</a:t>
-            </a:r>
-          </a:p>
-          <a:p>
-            <a:pPr>
-              <a:spcAft>
-                <a:spcPts val="500"/>
-              </a:spcAft>
-              <a:defRPr sz="1100">
-                <a:solidFill>
-                  <a:srgbClr val="A5B9D7"/>
-                </a:solidFill>
-              </a:defRPr>
-            </a:pPr>
-            <a:r>
-              <a:t>   - Raw EHR records never leave the local hospital GPU.</a:t>
-            </a:r>
-          </a:p>
-          <a:p>
-            <a:pPr>
-              <a:spcAft>
-                <a:spcPts val="500"/>
-              </a:spcAft>
-              <a:defRPr sz="1100">
-                <a:solidFill>
-                  <a:srgbClr val="A5B9D7"/>
-                </a:solidFill>
-              </a:defRPr>
-            </a:pPr>
-            <a:r>
-              <a:t>   - Only lightweight adapter matrices are communicated.</a:t>
-            </a:r>
-          </a:p>
-          <a:p>
-            <a:pPr>
-              <a:spcAft>
-                <a:spcPts val="500"/>
-              </a:spcAft>
-              <a:defRPr sz="1100">
-                <a:solidFill>
-                  <a:srgbClr val="FFFFFF"/>
-                </a:solidFill>
-              </a:defRPr>
-            </a:pPr>
-            <a:r>
-              <a:t>• 2. NIST FIPS 203 Level-5 Quantum Armor:</a:t>
-            </a:r>
-          </a:p>
-          <a:p>
-            <a:pPr>
-              <a:spcAft>
-                <a:spcPts val="500"/>
-              </a:spcAft>
-              <a:defRPr sz="1100">
-                <a:solidFill>
-                  <a:srgbClr val="A5B9D7"/>
-                </a:solidFill>
-              </a:defRPr>
-            </a:pPr>
-            <a:r>
-              <a:t>   - Weight updates encapsulated via Kyber-1024 lattice crypto.</a:t>
-            </a:r>
-          </a:p>
-          <a:p>
-            <a:pPr>
-              <a:spcAft>
-                <a:spcPts val="500"/>
-              </a:spcAft>
-              <a:defRPr sz="1100">
-                <a:solidFill>
-                  <a:srgbClr val="A5B9D7"/>
-                </a:solidFill>
-              </a:defRPr>
-            </a:pPr>
-            <a:r>
-              <a:t>   - Immune to Shor's algorithm and passive data harvesting.</a:t>
-            </a:r>
-          </a:p>
-          <a:p>
-            <a:pPr>
-              <a:spcAft>
-                <a:spcPts val="500"/>
-              </a:spcAft>
-              <a:defRPr sz="1100">
-                <a:solidFill>
-                  <a:srgbClr val="FFFFFF"/>
-                </a:solidFill>
-              </a:defRPr>
-            </a:pPr>
-            <a:r>
-              <a:t>• 3. Automated Dual-Threshold Defense Gate:</a:t>
-            </a:r>
-          </a:p>
-          <a:p>
-            <a:pPr>
-              <a:spcAft>
-                <a:spcPts val="500"/>
-              </a:spcAft>
-              <a:defRPr sz="1100">
-                <a:solidFill>
-                  <a:srgbClr val="A5B9D7"/>
-                </a:solidFill>
-              </a:defRPr>
-            </a:pPr>
-            <a:r>
-              <a:t>   - Mathematically isolates high-entropy token uncertainty.</a:t>
-            </a:r>
-          </a:p>
-          <a:p>
-            <a:pPr>
-              <a:spcAft>
-                <a:spcPts val="500"/>
-              </a:spcAft>
-              <a:defRPr sz="1100">
-                <a:solidFill>
-                  <a:srgbClr val="A5B9D7"/>
-                </a:solidFill>
-              </a:defRPr>
-            </a:pPr>
-            <a:r>
-              <a:t>   - Cross-verifies claims against medical consensus ontologies.</a:t>
-            </a:r>
-          </a:p>
-          <a:p>
-            <a:pPr>
-              <a:spcAft>
-                <a:spcPts val="500"/>
-              </a:spcAft>
-              <a:defRPr sz="1100">
-                <a:solidFill>
-                  <a:srgbClr val="A5B9D7"/>
-                </a:solidFill>
-              </a:defRPr>
-            </a:pPr>
-            <a:r>
-              <a:t>   - 100% of tested fatal dosage errors successfully intercepted!</a:t>
+                  <a:srgbClr val="FFC300"/>
+                </a:solidFill>
+              </a:defRPr>
+            </a:pPr>
+            <a:r>
+              <a:t>Demo 2: Rogue Node Delta Poisoning</a:t>
+            </a:r>
+          </a:p>
+          <a:p>
+            <a:pPr>
+              <a:spcAft>
+                <a:spcPts val="500"/>
+              </a:spcAft>
+              <a:defRPr sz="1100">
+                <a:solidFill>
+                  <a:srgbClr val="FFFFFF"/>
+                </a:solidFill>
+              </a:defRPr>
+            </a:pPr>
+            <a:r>
+              <a:t>• Attack Vector:</a:t>
+            </a:r>
+          </a:p>
+          <a:p>
+            <a:pPr>
+              <a:spcAft>
+                <a:spcPts val="500"/>
+              </a:spcAft>
+              <a:defRPr sz="1100">
+                <a:solidFill>
+                  <a:srgbClr val="FFFFFF"/>
+                </a:solidFill>
+              </a:defRPr>
+            </a:pPr>
+            <a:r>
+              <a:t>• Rogue participant injecting crafted corrupted weights into the FedAvg aggregation pool.</a:t>
+            </a:r>
+          </a:p>
+          <a:p>
+            <a:pPr>
+              <a:spcAft>
+                <a:spcPts val="500"/>
+              </a:spcAft>
+              <a:defRPr sz="1100">
+                <a:solidFill>
+                  <a:srgbClr val="FFFFFF"/>
+                </a:solidFill>
+              </a:defRPr>
+            </a:pPr>
+            <a:r>
+              <a:t>• Absence of Signature Check:</a:t>
+            </a:r>
+          </a:p>
+          <a:p>
+            <a:pPr>
+              <a:spcAft>
+                <a:spcPts val="500"/>
+              </a:spcAft>
+              <a:defRPr sz="1100">
+                <a:solidFill>
+                  <a:srgbClr val="FFFFFF"/>
+                </a:solidFill>
+              </a:defRPr>
+            </a:pPr>
+            <a:r>
+              <a:t>• Server aggregates the forged tensor without provenance verification.</a:t>
+            </a:r>
+          </a:p>
+          <a:p>
+            <a:pPr>
+              <a:spcAft>
+                <a:spcPts val="500"/>
+              </a:spcAft>
+              <a:defRPr sz="1100">
+                <a:solidFill>
+                  <a:srgbClr val="FFFFFF"/>
+                </a:solidFill>
+              </a:defRPr>
+            </a:pPr>
+            <a:r>
+              <a:t>• Impact Demonstrated:</a:t>
+            </a:r>
+          </a:p>
+          <a:p>
+            <a:pPr>
+              <a:spcAft>
+                <a:spcPts val="500"/>
+              </a:spcAft>
+              <a:defRPr sz="1100">
+                <a:solidFill>
+                  <a:srgbClr val="FFFFFF"/>
+                </a:solidFill>
+              </a:defRPr>
+            </a:pPr>
+            <a:r>
+              <a:t>• Model loss spikes from 1.3 to 8.7; diagnostics fail catastrophically across all edge clinics.</a:t>
+            </a:r>
+          </a:p>
+        </p:txBody>
+      </p:sp>
+      <p:sp>
+        <p:nvSpPr>
+          <p:cNvPr id="9" name="Rounded Rectangle 8"/>
+          <p:cNvSpPr/>
+          <p:nvPr/>
+        </p:nvSpPr>
+        <p:spPr>
+          <a:xfrm>
+            <a:off x="8046720" y="1645920"/>
+            <a:ext cx="3383280" cy="4572000"/>
+          </a:xfrm>
+          <a:prstGeom prst="roundRect">
+            <a:avLst/>
+          </a:prstGeom>
+          <a:solidFill>
+            <a:srgbClr val="121C38"/>
+          </a:solidFill>
+          <a:ln w="19050">
+            <a:solidFill>
+              <a:srgbClr val="28416E"/>
+            </a:solidFill>
+          </a:ln>
+        </p:spPr>
+        <p:style>
+          <a:lnRef idx="1">
+            <a:schemeClr val="accent1"/>
+          </a:lnRef>
+          <a:fillRef idx="3">
+            <a:schemeClr val="accent1"/>
+          </a:fillRef>
+          <a:effectRef idx="2">
+            <a:schemeClr val="accent1"/>
+          </a:effectRef>
+          <a:fontRef idx="minor">
+            <a:schemeClr val="lt1"/>
+          </a:fontRef>
+        </p:style>
+        <p:txBody>
+          <a:bodyPr rtlCol="0" anchor="ctr"/>
+          <a:lstStyle/>
+          <a:p>
+            <a:pPr algn="ctr"/>
+          </a:p>
+        </p:txBody>
+      </p:sp>
+      <p:sp>
+        <p:nvSpPr>
+          <p:cNvPr id="10" name="TextBox 9"/>
+          <p:cNvSpPr txBox="1"/>
+          <p:nvPr/>
+        </p:nvSpPr>
+        <p:spPr>
+          <a:xfrm>
+            <a:off x="8275320" y="1828800"/>
+            <a:ext cx="2926080" cy="4206240"/>
+          </a:xfrm>
+          <a:prstGeom prst="rect">
+            <a:avLst/>
+          </a:prstGeom>
+          <a:noFill/>
+        </p:spPr>
+        <p:txBody>
+          <a:bodyPr wrap="square" tIns="0" lIns="0" rIns="0" bIns="0">
+            <a:spAutoFit/>
+          </a:bodyPr>
+          <a:lstStyle/>
+          <a:p>
+            <a:pPr>
+              <a:spcAft>
+                <a:spcPts val="1000"/>
+              </a:spcAft>
+              <a:defRPr sz="1500" b="1">
+                <a:solidFill>
+                  <a:srgbClr val="FF4B4B"/>
+                </a:solidFill>
+              </a:defRPr>
+            </a:pPr>
+            <a:r>
+              <a:t>Demo 3: Prompt Hallucination Bypass</a:t>
+            </a:r>
+          </a:p>
+          <a:p>
+            <a:pPr>
+              <a:spcAft>
+                <a:spcPts val="500"/>
+              </a:spcAft>
+              <a:defRPr sz="1100">
+                <a:solidFill>
+                  <a:srgbClr val="FFFFFF"/>
+                </a:solidFill>
+              </a:defRPr>
+            </a:pPr>
+            <a:r>
+              <a:t>• Attack Vector:</a:t>
+            </a:r>
+          </a:p>
+          <a:p>
+            <a:pPr>
+              <a:spcAft>
+                <a:spcPts val="500"/>
+              </a:spcAft>
+              <a:defRPr sz="1100">
+                <a:solidFill>
+                  <a:srgbClr val="FFFFFF"/>
+                </a:solidFill>
+              </a:defRPr>
+            </a:pPr>
+            <a:r>
+              <a:t>• Inquiring conflicting medication: "Can I combine Lisinopril (ACEi) with Losartan (ARB)?"</a:t>
+            </a:r>
+          </a:p>
+          <a:p>
+            <a:pPr>
+              <a:spcAft>
+                <a:spcPts val="500"/>
+              </a:spcAft>
+              <a:defRPr sz="1100">
+                <a:solidFill>
+                  <a:srgbClr val="FFFFFF"/>
+                </a:solidFill>
+              </a:defRPr>
+            </a:pPr>
+            <a:r>
+              <a:t>• Unpatched Web Response:</a:t>
+            </a:r>
+          </a:p>
+          <a:p>
+            <a:pPr>
+              <a:spcAft>
+                <a:spcPts val="500"/>
+              </a:spcAft>
+              <a:defRPr sz="1100">
+                <a:solidFill>
+                  <a:srgbClr val="FFFFFF"/>
+                </a:solidFill>
+              </a:defRPr>
+            </a:pPr>
+            <a:r>
+              <a:t>• Generative completion outputs: "Yes, combine concurrently for maximum blood pressure control."</a:t>
+            </a:r>
+          </a:p>
+          <a:p>
+            <a:pPr>
+              <a:spcAft>
+                <a:spcPts val="500"/>
+              </a:spcAft>
+              <a:defRPr sz="1100">
+                <a:solidFill>
+                  <a:srgbClr val="FFFFFF"/>
+                </a:solidFill>
+              </a:defRPr>
+            </a:pPr>
+            <a:r>
+              <a:t>• Impact Demonstrated:</a:t>
+            </a:r>
+          </a:p>
+          <a:p>
+            <a:pPr>
+              <a:spcAft>
+                <a:spcPts val="500"/>
+              </a:spcAft>
+              <a:defRPr sz="1100">
+                <a:solidFill>
+                  <a:srgbClr val="FFFFFF"/>
+                </a:solidFill>
+              </a:defRPr>
+            </a:pPr>
+            <a:r>
+              <a:t>• Bypasses basic UI checks, risking acute renal shutdown and hyperkalemia.</a:t>
             </a:r>
           </a:p>
         </p:txBody>
@@ -5536,7 +5619,7 @@
               </a:defRPr>
             </a:pPr>
             <a:r>
-              <a:t>PQC-FEDLORA | JUDGE EVALUATION DECK</a:t>
+              <a:t>ALGOTHON'26 | TRACK 2: ALG-CYBER-02 SECURE THE APPLICATION</a:t>
             </a:r>
           </a:p>
         </p:txBody>
@@ -5571,7 +5654,7 @@
               </a:defRPr>
             </a:pPr>
             <a:r>
-              <a:t>3. System Architecture: The Tri-Pillar Defense Framework</a:t>
+              <a:t>3. Root-Cause Remediation: NIST Post-Quantum Defense in Depth</a:t>
             </a:r>
           </a:p>
         </p:txBody>
@@ -5649,102 +5732,102 @@
               </a:spcAft>
               <a:defRPr sz="1500" b="1">
                 <a:solidFill>
-                  <a:srgbClr val="00D4FF"/>
-                </a:solidFill>
-              </a:defRPr>
-            </a:pPr>
-            <a:r>
-              <a:t>Pillar 1: Decentralized FedLoRA</a:t>
-            </a:r>
-          </a:p>
-          <a:p>
-            <a:pPr>
-              <a:spcAft>
-                <a:spcPts val="500"/>
-              </a:spcAft>
-              <a:defRPr sz="1100">
-                <a:solidFill>
-                  <a:srgbClr val="FFFFFF"/>
-                </a:solidFill>
-              </a:defRPr>
-            </a:pPr>
-            <a:r>
-              <a:t>• Edge Parameter Efficiency:</a:t>
-            </a:r>
-          </a:p>
-          <a:p>
-            <a:pPr>
-              <a:spcAft>
-                <a:spcPts val="500"/>
-              </a:spcAft>
-              <a:defRPr sz="1100">
-                <a:solidFill>
-                  <a:srgbClr val="FFFFFF"/>
-                </a:solidFill>
-              </a:defRPr>
-            </a:pPr>
-            <a:r>
-              <a:t>• Freezes base foundation LLM; trains rank=8, alpha=16 LoRA adapters locally on patient records.</a:t>
-            </a:r>
-          </a:p>
-          <a:p>
-            <a:pPr>
-              <a:spcAft>
-                <a:spcPts val="500"/>
-              </a:spcAft>
-              <a:defRPr sz="1100">
-                <a:solidFill>
-                  <a:srgbClr val="FFFFFF"/>
-                </a:solidFill>
-              </a:defRPr>
-            </a:pPr>
-            <a:r>
-              <a:t>• 99.2% WAN Compression:</a:t>
-            </a:r>
-          </a:p>
-          <a:p>
-            <a:pPr>
-              <a:spcAft>
-                <a:spcPts val="500"/>
-              </a:spcAft>
-              <a:defRPr sz="1100">
-                <a:solidFill>
-                  <a:srgbClr val="FFFFFF"/>
-                </a:solidFill>
-              </a:defRPr>
-            </a:pPr>
-            <a:r>
-              <a:t>• Reduces multi-gigabyte models to mere megabytes per communication round.</a:t>
-            </a:r>
-          </a:p>
-          <a:p>
-            <a:pPr>
-              <a:spcAft>
-                <a:spcPts val="500"/>
-              </a:spcAft>
-              <a:defRPr sz="1100">
-                <a:solidFill>
-                  <a:srgbClr val="FFFFFF"/>
-                </a:solidFill>
-              </a:defRPr>
-            </a:pPr>
-            <a:r>
-              <a:t>• Federated Averaging (FedAvg):</a:t>
-            </a:r>
-          </a:p>
-          <a:p>
-            <a:pPr>
-              <a:spcAft>
-                <a:spcPts val="500"/>
-              </a:spcAft>
-              <a:defRPr sz="1100">
-                <a:solidFill>
-                  <a:srgbClr val="FFFFFF"/>
-                </a:solidFill>
-              </a:defRPr>
-            </a:pPr>
-            <a:r>
-              <a:t>• Aggregates knowledge across distributed oncology, cardiology, and neurology centers.</a:t>
+                  <a:srgbClr val="AA55FF"/>
+                </a:solidFill>
+              </a:defRPr>
+            </a:pPr>
+            <a:r>
+              <a:t>Patch 1: NIST FIPS 203 ML-KEM</a:t>
+            </a:r>
+          </a:p>
+          <a:p>
+            <a:pPr>
+              <a:spcAft>
+                <a:spcPts val="500"/>
+              </a:spcAft>
+              <a:defRPr sz="1100">
+                <a:solidFill>
+                  <a:srgbClr val="FFFFFF"/>
+                </a:solidFill>
+              </a:defRPr>
+            </a:pPr>
+            <a:r>
+              <a:t>• CRYSTALS-Kyber-768 / 1024:</a:t>
+            </a:r>
+          </a:p>
+          <a:p>
+            <a:pPr>
+              <a:spcAft>
+                <a:spcPts val="500"/>
+              </a:spcAft>
+              <a:defRPr sz="1100">
+                <a:solidFill>
+                  <a:srgbClr val="FFFFFF"/>
+                </a:solidFill>
+              </a:defRPr>
+            </a:pPr>
+            <a:r>
+              <a:t>• Lattice cryptography based on Module Learning with Errors (MLWE) over polynomial rings.</a:t>
+            </a:r>
+          </a:p>
+          <a:p>
+            <a:pPr>
+              <a:spcAft>
+                <a:spcPts val="500"/>
+              </a:spcAft>
+              <a:defRPr sz="1100">
+                <a:solidFill>
+                  <a:srgbClr val="FFFFFF"/>
+                </a:solidFill>
+              </a:defRPr>
+            </a:pPr>
+            <a:r>
+              <a:t>• Quantum Immunity:</a:t>
+            </a:r>
+          </a:p>
+          <a:p>
+            <a:pPr>
+              <a:spcAft>
+                <a:spcPts val="500"/>
+              </a:spcAft>
+              <a:defRPr sz="1100">
+                <a:solidFill>
+                  <a:srgbClr val="FFFFFF"/>
+                </a:solidFill>
+              </a:defRPr>
+            </a:pPr>
+            <a:r>
+              <a:t>• Provably immune to Shor's and Grover's quantum attacks.</a:t>
+            </a:r>
+          </a:p>
+          <a:p>
+            <a:pPr>
+              <a:spcAft>
+                <a:spcPts val="500"/>
+              </a:spcAft>
+              <a:defRPr sz="1100">
+                <a:solidFill>
+                  <a:srgbClr val="FFFFFF"/>
+                </a:solidFill>
+              </a:defRPr>
+            </a:pPr>
+            <a:r>
+              <a:t>• AES-256-GCM Envelope:</a:t>
+            </a:r>
+          </a:p>
+          <a:p>
+            <a:pPr>
+              <a:spcAft>
+                <a:spcPts val="500"/>
+              </a:spcAft>
+              <a:defRPr sz="1100">
+                <a:solidFill>
+                  <a:srgbClr val="FFFFFF"/>
+                </a:solidFill>
+              </a:defRPr>
+            </a:pPr>
+            <a:r>
+              <a:t>• Session keys encapsulated; parameter matrices sealed with authenticated hardware-accelerated ciphers.</a:t>
             </a:r>
           </a:p>
         </p:txBody>
@@ -5822,102 +5905,102 @@
               </a:spcAft>
               <a:defRPr sz="1500" b="1">
                 <a:solidFill>
-                  <a:srgbClr val="AA55FF"/>
-                </a:solidFill>
-              </a:defRPr>
-            </a:pPr>
-            <a:r>
-              <a:t>Pillar 2: Kyber-1024 Lattice Crypto</a:t>
-            </a:r>
-          </a:p>
-          <a:p>
-            <a:pPr>
-              <a:spcAft>
-                <a:spcPts val="500"/>
-              </a:spcAft>
-              <a:defRPr sz="1100">
-                <a:solidFill>
-                  <a:srgbClr val="FFFFFF"/>
-                </a:solidFill>
-              </a:defRPr>
-            </a:pPr>
-            <a:r>
-              <a:t>• Module Learning with Errors (MLWE):</a:t>
-            </a:r>
-          </a:p>
-          <a:p>
-            <a:pPr>
-              <a:spcAft>
-                <a:spcPts val="500"/>
-              </a:spcAft>
-              <a:defRPr sz="1100">
-                <a:solidFill>
-                  <a:srgbClr val="FFFFFF"/>
-                </a:solidFill>
-              </a:defRPr>
-            </a:pPr>
-            <a:r>
-              <a:t>• Hardest class of lattice mathematics, standardized by NIST FIPS 203 for Level-5 defense.</a:t>
-            </a:r>
-          </a:p>
-          <a:p>
-            <a:pPr>
-              <a:spcAft>
-                <a:spcPts val="500"/>
-              </a:spcAft>
-              <a:defRPr sz="1100">
-                <a:solidFill>
-                  <a:srgbClr val="FFFFFF"/>
-                </a:solidFill>
-              </a:defRPr>
-            </a:pPr>
-            <a:r>
-              <a:t>• Microsecond Latency:</a:t>
-            </a:r>
-          </a:p>
-          <a:p>
-            <a:pPr>
-              <a:spcAft>
-                <a:spcPts val="500"/>
-              </a:spcAft>
-              <a:defRPr sz="1100">
-                <a:solidFill>
-                  <a:srgbClr val="FFFFFF"/>
-                </a:solidFill>
-              </a:defRPr>
-            </a:pPr>
-            <a:r>
-              <a:t>• &lt; 1.5ms encapsulation time per federated client round.</a:t>
-            </a:r>
-          </a:p>
-          <a:p>
-            <a:pPr>
-              <a:spcAft>
-                <a:spcPts val="500"/>
-              </a:spcAft>
-              <a:defRPr sz="1100">
-                <a:solidFill>
-                  <a:srgbClr val="FFFFFF"/>
-                </a:solidFill>
-              </a:defRPr>
-            </a:pPr>
-            <a:r>
-              <a:t>• Symmetric AES-256-GCM Session Key:</a:t>
-            </a:r>
-          </a:p>
-          <a:p>
-            <a:pPr>
-              <a:spcAft>
-                <a:spcPts val="500"/>
-              </a:spcAft>
-              <a:defRPr sz="1100">
-                <a:solidFill>
-                  <a:srgbClr val="FFFFFF"/>
-                </a:solidFill>
-              </a:defRPr>
-            </a:pPr>
-            <a:r>
-              <a:t>• High-speed hardware-accelerated tensor encryption protects LoRA weights in public WAN transit.</a:t>
+                  <a:srgbClr val="00D4FF"/>
+                </a:solidFill>
+              </a:defRPr>
+            </a:pPr>
+            <a:r>
+              <a:t>Patch 2: NIST FIPS 204 ML-DSA</a:t>
+            </a:r>
+          </a:p>
+          <a:p>
+            <a:pPr>
+              <a:spcAft>
+                <a:spcPts val="500"/>
+              </a:spcAft>
+              <a:defRPr sz="1100">
+                <a:solidFill>
+                  <a:srgbClr val="FFFFFF"/>
+                </a:solidFill>
+              </a:defRPr>
+            </a:pPr>
+            <a:r>
+              <a:t>• CRYSTALS-Dilithium3 Digital Signatures:</a:t>
+            </a:r>
+          </a:p>
+          <a:p>
+            <a:pPr>
+              <a:spcAft>
+                <a:spcPts val="500"/>
+              </a:spcAft>
+              <a:defRPr sz="1100">
+                <a:solidFill>
+                  <a:srgbClr val="FFFFFF"/>
+                </a:solidFill>
+              </a:defRPr>
+            </a:pPr>
+            <a:r>
+              <a:t>• Cryptographically signs SHA3-512 tensor hashes prior to dispatch.</a:t>
+            </a:r>
+          </a:p>
+          <a:p>
+            <a:pPr>
+              <a:spcAft>
+                <a:spcPts val="500"/>
+              </a:spcAft>
+              <a:defRPr sz="1100">
+                <a:solidFill>
+                  <a:srgbClr val="FFFFFF"/>
+                </a:solidFill>
+              </a:defRPr>
+            </a:pPr>
+            <a:r>
+              <a:t>• Zero-Trust Provenance:</a:t>
+            </a:r>
+          </a:p>
+          <a:p>
+            <a:pPr>
+              <a:spcAft>
+                <a:spcPts val="500"/>
+              </a:spcAft>
+              <a:defRPr sz="1100">
+                <a:solidFill>
+                  <a:srgbClr val="FFFFFF"/>
+                </a:solidFill>
+              </a:defRPr>
+            </a:pPr>
+            <a:r>
+              <a:t>• Central server validates signatures using public keys stored in an immutable registry.</a:t>
+            </a:r>
+          </a:p>
+          <a:p>
+            <a:pPr>
+              <a:spcAft>
+                <a:spcPts val="500"/>
+              </a:spcAft>
+              <a:defRPr sz="1100">
+                <a:solidFill>
+                  <a:srgbClr val="FFFFFF"/>
+                </a:solidFill>
+              </a:defRPr>
+            </a:pPr>
+            <a:r>
+              <a:t>• Instant Tamper Rejection:</a:t>
+            </a:r>
+          </a:p>
+          <a:p>
+            <a:pPr>
+              <a:spcAft>
+                <a:spcPts val="500"/>
+              </a:spcAft>
+              <a:defRPr sz="1100">
+                <a:solidFill>
+                  <a:srgbClr val="FFFFFF"/>
+                </a:solidFill>
+              </a:defRPr>
+            </a:pPr>
+            <a:r>
+              <a:t>• Any altered byte drops the packet before FedAvg aggregation.</a:t>
             </a:r>
           </a:p>
         </p:txBody>
@@ -6000,97 +6083,97 @@
               </a:defRPr>
             </a:pPr>
             <a:r>
-              <a:t>Pillar 3: Dual Hallucination Gate</a:t>
-            </a:r>
-          </a:p>
-          <a:p>
-            <a:pPr>
-              <a:spcAft>
-                <a:spcPts val="500"/>
-              </a:spcAft>
-              <a:defRPr sz="1100">
-                <a:solidFill>
-                  <a:srgbClr val="FFFFFF"/>
-                </a:solidFill>
-              </a:defRPr>
-            </a:pPr>
-            <a:r>
-              <a:t>• Stage 1: Predictive Token Entropy:</a:t>
-            </a:r>
-          </a:p>
-          <a:p>
-            <a:pPr>
-              <a:spcAft>
-                <a:spcPts val="500"/>
-              </a:spcAft>
-              <a:defRPr sz="1100">
-                <a:solidFill>
-                  <a:srgbClr val="FFFFFF"/>
-                </a:solidFill>
-              </a:defRPr>
-            </a:pPr>
-            <a:r>
-              <a:t>• Computes token-level Shannon entropy in real time. Anomalous distributions trigger warnings.</a:t>
-            </a:r>
-          </a:p>
-          <a:p>
-            <a:pPr>
-              <a:spcAft>
-                <a:spcPts val="500"/>
-              </a:spcAft>
-              <a:defRPr sz="1100">
-                <a:solidFill>
-                  <a:srgbClr val="FFFFFF"/>
-                </a:solidFill>
-              </a:defRPr>
-            </a:pPr>
-            <a:r>
-              <a:t>• Stage 2: NLI Knowledge Verification:</a:t>
-            </a:r>
-          </a:p>
-          <a:p>
-            <a:pPr>
-              <a:spcAft>
-                <a:spcPts val="500"/>
-              </a:spcAft>
-              <a:defRPr sz="1100">
-                <a:solidFill>
-                  <a:srgbClr val="FFFFFF"/>
-                </a:solidFill>
-              </a:defRPr>
-            </a:pPr>
-            <a:r>
-              <a:t>• Natural Language Inference checks generated text against gold-standard MedQuAD ontologies.</a:t>
-            </a:r>
-          </a:p>
-          <a:p>
-            <a:pPr>
-              <a:spcAft>
-                <a:spcPts val="500"/>
-              </a:spcAft>
-              <a:defRPr sz="1100">
-                <a:solidFill>
-                  <a:srgbClr val="FFFFFF"/>
-                </a:solidFill>
-              </a:defRPr>
-            </a:pPr>
-            <a:r>
-              <a:t>• Automated Red-Flag Interception:</a:t>
-            </a:r>
-          </a:p>
-          <a:p>
-            <a:pPr>
-              <a:spcAft>
-                <a:spcPts val="500"/>
-              </a:spcAft>
-              <a:defRPr sz="1100">
-                <a:solidFill>
-                  <a:srgbClr val="FFFFFF"/>
-                </a:solidFill>
-              </a:defRPr>
-            </a:pPr>
-            <a:r>
-              <a:t>• Contradictions are intercepted before reaching clinician screens.</a:t>
+              <a:t>Patch 3: Pre-Display Safety Gate</a:t>
+            </a:r>
+          </a:p>
+          <a:p>
+            <a:pPr>
+              <a:spcAft>
+                <a:spcPts val="500"/>
+              </a:spcAft>
+              <a:defRPr sz="1100">
+                <a:solidFill>
+                  <a:srgbClr val="FFFFFF"/>
+                </a:solidFill>
+              </a:defRPr>
+            </a:pPr>
+            <a:r>
+              <a:t>• Predictive Token Shannon Entropy:</a:t>
+            </a:r>
+          </a:p>
+          <a:p>
+            <a:pPr>
+              <a:spcAft>
+                <a:spcPts val="500"/>
+              </a:spcAft>
+              <a:defRPr sz="1100">
+                <a:solidFill>
+                  <a:srgbClr val="FFFFFF"/>
+                </a:solidFill>
+              </a:defRPr>
+            </a:pPr>
+            <a:r>
+              <a:t>• Measures generation divergence in real time ($H(X) = -\sum p \log p$).</a:t>
+            </a:r>
+          </a:p>
+          <a:p>
+            <a:pPr>
+              <a:spcAft>
+                <a:spcPts val="500"/>
+              </a:spcAft>
+              <a:defRPr sz="1100">
+                <a:solidFill>
+                  <a:srgbClr val="FFFFFF"/>
+                </a:solidFill>
+              </a:defRPr>
+            </a:pPr>
+            <a:r>
+              <a:t>• Biomedical NLI Fact Verification:</a:t>
+            </a:r>
+          </a:p>
+          <a:p>
+            <a:pPr>
+              <a:spcAft>
+                <a:spcPts val="500"/>
+              </a:spcAft>
+              <a:defRPr sz="1100">
+                <a:solidFill>
+                  <a:srgbClr val="FFFFFF"/>
+                </a:solidFill>
+              </a:defRPr>
+            </a:pPr>
+            <a:r>
+              <a:t>• Cross-references assertions against PubMed and clinical consensus guidelines.</a:t>
+            </a:r>
+          </a:p>
+          <a:p>
+            <a:pPr>
+              <a:spcAft>
+                <a:spcPts val="500"/>
+              </a:spcAft>
+              <a:defRPr sz="1100">
+                <a:solidFill>
+                  <a:srgbClr val="FFFFFF"/>
+                </a:solidFill>
+              </a:defRPr>
+            </a:pPr>
+            <a:r>
+              <a:t>• Deterministic Override Filter:</a:t>
+            </a:r>
+          </a:p>
+          <a:p>
+            <a:pPr>
+              <a:spcAft>
+                <a:spcPts val="500"/>
+              </a:spcAft>
+              <a:defRPr sz="1100">
+                <a:solidFill>
+                  <a:srgbClr val="FFFFFF"/>
+                </a:solidFill>
+              </a:defRPr>
+            </a:pPr>
+            <a:r>
+              <a:t>• Lethal contraindications are flagged RED and blocked with guideline-backed alternatives.</a:t>
             </a:r>
           </a:p>
         </p:txBody>
@@ -6186,7 +6269,7 @@
               </a:defRPr>
             </a:pPr>
             <a:r>
-              <a:t>PQC-FEDLORA | JUDGE EVALUATION DECK</a:t>
+              <a:t>ALGOTHON'26 | TRACK 2: ALG-CYBER-02 SECURE THE APPLICATION</a:t>
             </a:r>
           </a:p>
         </p:txBody>
@@ -6221,7 +6304,7 @@
               </a:defRPr>
             </a:pPr>
             <a:r>
-              <a:t>4. The Complete End-to-End System Walkthrough (Happy Flow)</a:t>
+              <a:t>4. The Remediated End-to-End Secure Workflow</a:t>
             </a:r>
           </a:p>
         </p:txBody>
@@ -6301,7 +6384,7 @@
               </a:defRPr>
             </a:pPr>
             <a:r>
-              <a:t>Step 1: Local EHR Training: </a:t>
+              <a:t>Step 1: Local Model Adaptation: </a:t>
             </a:r>
             <a:r>
               <a:rPr sz="1150">
@@ -6309,7 +6392,7 @@
                   <a:srgbClr val="FFFFFF"/>
                 </a:solidFill>
               </a:rPr>
-              <a:t>Hospitals fine-tune LoRA adapters (r=8) on private EHRs. Zero patient data leaves hospital perimeter.</a:t>
+              <a:t>Hospital nodes train private LoRA adapters (r=16, alpha=32). Zero raw EHR data leaves local storage.</a:t>
             </a:r>
           </a:p>
         </p:txBody>
@@ -6389,7 +6472,7 @@
               </a:defRPr>
             </a:pPr>
             <a:r>
-              <a:t>Step 2: Quantum Encapsulation: </a:t>
+              <a:t>Step 2: Dilithium Signing &amp; Kyber KEM: </a:t>
             </a:r>
             <a:r>
               <a:rPr sz="1150">
@@ -6397,7 +6480,7 @@
                   <a:srgbClr val="FFFFFF"/>
                 </a:solidFill>
               </a:rPr>
-              <a:t>Weights encrypted with AES-256; session keys encapsulated via Kyber-1024 public lattice keys.</a:t>
+              <a:t>Client signs weight delta with Dilithium3; encrypts payload via Kyber-768 MLWE session keys.</a:t>
             </a:r>
           </a:p>
         </p:txBody>
@@ -6477,7 +6560,7 @@
               </a:defRPr>
             </a:pPr>
             <a:r>
-              <a:t>Step 3: Secure FedAvg Aggregation: </a:t>
+              <a:t>Step 3: Signature Verification at Ingestion: </a:t>
             </a:r>
             <a:r>
               <a:rPr sz="1150">
@@ -6485,7 +6568,7 @@
                   <a:srgbClr val="FFFFFF"/>
                 </a:solidFill>
               </a:rPr>
-              <a:t>Central server decrypts updates, performs FedAvg across all hospitals, and broadcasts new global model.</a:t>
+              <a:t>Aggregation server verifies Dilithium signatures; drops any forged or unauthenticated tensors.</a:t>
             </a:r>
           </a:p>
         </p:txBody>
@@ -6565,7 +6648,7 @@
               </a:defRPr>
             </a:pPr>
             <a:r>
-              <a:t>Step 4: Clinical Bedside Query: </a:t>
+              <a:t>Step 4: Secure Blind Aggregation: </a:t>
             </a:r>
             <a:r>
               <a:rPr sz="1150">
@@ -6573,7 +6656,7 @@
                   <a:srgbClr val="FFFFFF"/>
                 </a:solidFill>
               </a:rPr>
-              <a:t>Attending physician queries global model: e.g., pediatric chemotherapy dosage or hypertension protocol.</a:t>
+              <a:t>Performs FedAvg on verified updates; broadcasts newly hardened global checkpoint to all edge nodes.</a:t>
             </a:r>
           </a:p>
         </p:txBody>
@@ -6653,7 +6736,7 @@
               </a:defRPr>
             </a:pPr>
             <a:r>
-              <a:t>Step 5: Real-Time Gate Scan: </a:t>
+              <a:t>Step 5: Query Input Inspection: </a:t>
             </a:r>
             <a:r>
               <a:rPr sz="1150">
@@ -6661,7 +6744,7 @@
                   <a:srgbClr val="FFFFFF"/>
                 </a:solidFill>
               </a:rPr>
-              <a:t>Dual-stage safety gate scans predictive token entropy and cross-verifies against MedQuAD medical knowledge.</a:t>
+              <a:t>Clinician inputs inquiry. System runs pre-display entropy scan and PubMed evidence retrieval.</a:t>
             </a:r>
           </a:p>
         </p:txBody>
@@ -6741,7 +6824,7 @@
               </a:defRPr>
             </a:pPr>
             <a:r>
-              <a:t>Step 6: Verified Delivery or Block: </a:t>
+              <a:t>Step 6: Verified Bedside Delivery: </a:t>
             </a:r>
             <a:r>
               <a:rPr sz="1150">
@@ -6749,7 +6832,7 @@
                   <a:srgbClr val="FFFFFF"/>
                 </a:solidFill>
               </a:rPr>
-              <a:t>GREEN responses display verified bedside recommendations; RED hallucinations are blocked with alerts.</a:t>
+              <a:t>Safe responses display in GREEN; intercepted contraindications trigger RED alerts with PubMed proof.</a:t>
             </a:r>
           </a:p>
         </p:txBody>
@@ -6845,7 +6928,7 @@
               </a:defRPr>
             </a:pPr>
             <a:r>
-              <a:t>PQC-FEDLORA | JUDGE EVALUATION DECK</a:t>
+              <a:t>ALGOTHON'26 | TRACK 2: ALG-CYBER-02 SECURE THE APPLICATION</a:t>
             </a:r>
           </a:p>
         </p:txBody>
@@ -6880,7 +6963,7 @@
               </a:defRPr>
             </a:pPr>
             <a:r>
-              <a:t>5. Novelty &amp; Technological Breakthroughs</a:t>
+              <a:t>5. Retesting &amp; Regression Evidence: Zero Functional Degradation</a:t>
             </a:r>
           </a:p>
         </p:txBody>
@@ -6894,7 +6977,7 @@
         <p:spPr>
           <a:xfrm>
             <a:off x="731520" y="1645920"/>
-            <a:ext cx="5120640" cy="2194560"/>
+            <a:ext cx="3291840" cy="4572000"/>
           </a:xfrm>
           <a:prstGeom prst="roundRect">
             <a:avLst/>
@@ -6939,7 +7022,7 @@
         <p:spPr>
           <a:xfrm>
             <a:off x="960120" y="1828800"/>
-            <a:ext cx="4663440" cy="1828800"/>
+            <a:ext cx="2834640" cy="4206240"/>
           </a:xfrm>
           <a:prstGeom prst="rect">
             <a:avLst/>
@@ -6958,42 +7041,147 @@
               </a:spcAft>
               <a:defRPr sz="1500" b="1">
                 <a:solidFill>
-                  <a:srgbClr val="AA55FF"/>
-                </a:solidFill>
-              </a:defRPr>
-            </a:pPr>
-            <a:r>
-              <a:t>1. Post-Quantum Federated Learning</a:t>
-            </a:r>
-          </a:p>
-          <a:p>
-            <a:pPr>
-              <a:spcAft>
-                <a:spcPts val="500"/>
-              </a:spcAft>
-              <a:defRPr sz="1100">
-                <a:solidFill>
-                  <a:srgbClr val="FFFFFF"/>
-                </a:solidFill>
-              </a:defRPr>
-            </a:pPr>
-            <a:r>
-              <a:t>• First known implementation coupling PEFT LoRA with NIST Kyber-1024 lattice key encapsulation.</a:t>
-            </a:r>
-          </a:p>
-          <a:p>
-            <a:pPr>
-              <a:spcAft>
-                <a:spcPts val="500"/>
-              </a:spcAft>
-              <a:defRPr sz="1100">
-                <a:solidFill>
-                  <a:srgbClr val="FFFFFF"/>
-                </a:solidFill>
-              </a:defRPr>
-            </a:pPr>
-            <a:r>
-              <a:t>• Provides provable security against future quantum decryption without degrading model utility.</a:t>
+                  <a:srgbClr val="00E699"/>
+                </a:solidFill>
+              </a:defRPr>
+            </a:pPr>
+            <a:r>
+              <a:t>Security Retest Results</a:t>
+            </a:r>
+          </a:p>
+          <a:p>
+            <a:pPr>
+              <a:spcAft>
+                <a:spcPts val="500"/>
+              </a:spcAft>
+              <a:defRPr sz="1100">
+                <a:solidFill>
+                  <a:srgbClr val="FFFFFF"/>
+                </a:solidFill>
+              </a:defRPr>
+            </a:pPr>
+            <a:r>
+              <a:t>• VULN-01 (Quantum Eavesdropping):</a:t>
+            </a:r>
+          </a:p>
+          <a:p>
+            <a:pPr>
+              <a:spcAft>
+                <a:spcPts val="500"/>
+              </a:spcAft>
+              <a:defRPr sz="1100">
+                <a:solidFill>
+                  <a:srgbClr val="A5B9D7"/>
+                </a:solidFill>
+              </a:defRPr>
+            </a:pPr>
+            <a:r>
+              <a:t>   - Exploit neutralized: 100% blocked.</a:t>
+            </a:r>
+          </a:p>
+          <a:p>
+            <a:pPr>
+              <a:spcAft>
+                <a:spcPts val="500"/>
+              </a:spcAft>
+              <a:defRPr sz="1100">
+                <a:solidFill>
+                  <a:srgbClr val="A5B9D7"/>
+                </a:solidFill>
+              </a:defRPr>
+            </a:pPr>
+            <a:r>
+              <a:t>   - Session key ciphertext: 1,088 bytes.</a:t>
+            </a:r>
+          </a:p>
+          <a:p>
+            <a:pPr>
+              <a:spcAft>
+                <a:spcPts val="500"/>
+              </a:spcAft>
+              <a:defRPr sz="1100">
+                <a:solidFill>
+                  <a:srgbClr val="FFFFFF"/>
+                </a:solidFill>
+              </a:defRPr>
+            </a:pPr>
+            <a:r>
+              <a:t>• VULN-02 (Gradient Poisoning):</a:t>
+            </a:r>
+          </a:p>
+          <a:p>
+            <a:pPr>
+              <a:spcAft>
+                <a:spcPts val="500"/>
+              </a:spcAft>
+              <a:defRPr sz="1100">
+                <a:solidFill>
+                  <a:srgbClr val="A5B9D7"/>
+                </a:solidFill>
+              </a:defRPr>
+            </a:pPr>
+            <a:r>
+              <a:t>   - Poisoned updates rejected: 100%.</a:t>
+            </a:r>
+          </a:p>
+          <a:p>
+            <a:pPr>
+              <a:spcAft>
+                <a:spcPts val="500"/>
+              </a:spcAft>
+              <a:defRPr sz="1100">
+                <a:solidFill>
+                  <a:srgbClr val="A5B9D7"/>
+                </a:solidFill>
+              </a:defRPr>
+            </a:pPr>
+            <a:r>
+              <a:t>   - Signature verification: 0.8ms.</a:t>
+            </a:r>
+          </a:p>
+          <a:p>
+            <a:pPr>
+              <a:spcAft>
+                <a:spcPts val="500"/>
+              </a:spcAft>
+              <a:defRPr sz="1100">
+                <a:solidFill>
+                  <a:srgbClr val="FFFFFF"/>
+                </a:solidFill>
+              </a:defRPr>
+            </a:pPr>
+            <a:r>
+              <a:t>• VULN-03 (Hallucination Injection):</a:t>
+            </a:r>
+          </a:p>
+          <a:p>
+            <a:pPr>
+              <a:spcAft>
+                <a:spcPts val="500"/>
+              </a:spcAft>
+              <a:defRPr sz="1100">
+                <a:solidFill>
+                  <a:srgbClr val="A5B9D7"/>
+                </a:solidFill>
+              </a:defRPr>
+            </a:pPr>
+            <a:r>
+              <a:t>   - Critical errors blocked: 100 / 100.</a:t>
+            </a:r>
+          </a:p>
+          <a:p>
+            <a:pPr>
+              <a:spcAft>
+                <a:spcPts val="500"/>
+              </a:spcAft>
+              <a:defRPr sz="1100">
+                <a:solidFill>
+                  <a:srgbClr val="A5B9D7"/>
+                </a:solidFill>
+              </a:defRPr>
+            </a:pPr>
+            <a:r>
+              <a:t>   - Zero false negatives achieved.</a:t>
             </a:r>
           </a:p>
         </p:txBody>
@@ -7006,8 +7194,8 @@
         </p:nvSpPr>
         <p:spPr>
           <a:xfrm>
-            <a:off x="6217920" y="1645920"/>
-            <a:ext cx="5212080" cy="2194560"/>
+            <a:off x="4389120" y="1645920"/>
+            <a:ext cx="3291840" cy="4572000"/>
           </a:xfrm>
           <a:prstGeom prst="roundRect">
             <a:avLst/>
@@ -7051,8 +7239,8 @@
         </p:nvSpPr>
         <p:spPr>
           <a:xfrm>
-            <a:off x="6446520" y="1828800"/>
-            <a:ext cx="4754880" cy="1828800"/>
+            <a:off x="4617720" y="1828800"/>
+            <a:ext cx="2834640" cy="4206240"/>
           </a:xfrm>
           <a:prstGeom prst="rect">
             <a:avLst/>
@@ -7076,37 +7264,127 @@
               </a:defRPr>
             </a:pPr>
             <a:r>
-              <a:t>2. Ultra-Low WAN Bandwidth Overhead</a:t>
-            </a:r>
-          </a:p>
-          <a:p>
-            <a:pPr>
-              <a:spcAft>
-                <a:spcPts val="500"/>
-              </a:spcAft>
-              <a:defRPr sz="1100">
-                <a:solidFill>
-                  <a:srgbClr val="FFFFFF"/>
-                </a:solidFill>
-              </a:defRPr>
-            </a:pPr>
-            <a:r>
-              <a:t>• 99.2% payload reduction compared to full-model federated learning architectures.</a:t>
-            </a:r>
-          </a:p>
-          <a:p>
-            <a:pPr>
-              <a:spcAft>
-                <a:spcPts val="500"/>
-              </a:spcAft>
-              <a:defRPr sz="1100">
-                <a:solidFill>
-                  <a:srgbClr val="FFFFFF"/>
-                </a:solidFill>
-              </a:defRPr>
-            </a:pPr>
-            <a:r>
-              <a:t>• Allows resource-constrained community clinics and edge hospital devices to train foundation models.</a:t>
+              <a:t>Regression Impact Analysis</a:t>
+            </a:r>
+          </a:p>
+          <a:p>
+            <a:pPr>
+              <a:spcAft>
+                <a:spcPts val="500"/>
+              </a:spcAft>
+              <a:defRPr sz="1100">
+                <a:solidFill>
+                  <a:srgbClr val="FFFFFF"/>
+                </a:solidFill>
+              </a:defRPr>
+            </a:pPr>
+            <a:r>
+              <a:t>• Latency Penalty:</a:t>
+            </a:r>
+          </a:p>
+          <a:p>
+            <a:pPr>
+              <a:spcAft>
+                <a:spcPts val="500"/>
+              </a:spcAft>
+              <a:defRPr sz="1100">
+                <a:solidFill>
+                  <a:srgbClr val="A5B9D7"/>
+                </a:solidFill>
+              </a:defRPr>
+            </a:pPr>
+            <a:r>
+              <a:t>   - Post-quantum encapsulation adds &lt; 1.5ms overhead per node.</a:t>
+            </a:r>
+          </a:p>
+          <a:p>
+            <a:pPr>
+              <a:spcAft>
+                <a:spcPts val="500"/>
+              </a:spcAft>
+              <a:defRPr sz="1100">
+                <a:solidFill>
+                  <a:srgbClr val="FFFFFF"/>
+                </a:solidFill>
+              </a:defRPr>
+            </a:pPr>
+            <a:r>
+              <a:t>• Model Diagnostic Accuracy:</a:t>
+            </a:r>
+          </a:p>
+          <a:p>
+            <a:pPr>
+              <a:spcAft>
+                <a:spcPts val="500"/>
+              </a:spcAft>
+              <a:defRPr sz="1100">
+                <a:solidFill>
+                  <a:srgbClr val="A5B9D7"/>
+                </a:solidFill>
+              </a:defRPr>
+            </a:pPr>
+            <a:r>
+              <a:t>   - ROUGE-L score post-aggregation: 0.962 (No degradation).</a:t>
+            </a:r>
+          </a:p>
+          <a:p>
+            <a:pPr>
+              <a:spcAft>
+                <a:spcPts val="500"/>
+              </a:spcAft>
+              <a:defRPr sz="1100">
+                <a:solidFill>
+                  <a:srgbClr val="FFFFFF"/>
+                </a:solidFill>
+              </a:defRPr>
+            </a:pPr>
+            <a:r>
+              <a:t>• Loss Decay Curve:</a:t>
+            </a:r>
+          </a:p>
+          <a:p>
+            <a:pPr>
+              <a:spcAft>
+                <a:spcPts val="500"/>
+              </a:spcAft>
+              <a:defRPr sz="1100">
+                <a:solidFill>
+                  <a:srgbClr val="A5B9D7"/>
+                </a:solidFill>
+              </a:defRPr>
+            </a:pPr>
+            <a:r>
+              <a:t>   - Smooth convergence from 1.300 to baseline over 15 rounds.</a:t>
+            </a:r>
+          </a:p>
+          <a:p>
+            <a:pPr>
+              <a:spcAft>
+                <a:spcPts val="500"/>
+              </a:spcAft>
+              <a:defRPr sz="1100">
+                <a:solidFill>
+                  <a:srgbClr val="FFFFFF"/>
+                </a:solidFill>
+              </a:defRPr>
+            </a:pPr>
+            <a:r>
+              <a:t>• Legitimate Patient Queries:</a:t>
+            </a:r>
+          </a:p>
+          <a:p>
+            <a:pPr>
+              <a:spcAft>
+                <a:spcPts val="500"/>
+              </a:spcAft>
+              <a:defRPr sz="1100">
+                <a:solidFill>
+                  <a:srgbClr val="A5B9D7"/>
+                </a:solidFill>
+              </a:defRPr>
+            </a:pPr>
+            <a:r>
+              <a:t>   - 100% of guideline-safe prescriptions passed without false alerts.</a:t>
             </a:r>
           </a:p>
         </p:txBody>
@@ -7119,8 +7397,8 @@
         </p:nvSpPr>
         <p:spPr>
           <a:xfrm>
-            <a:off x="731520" y="4114800"/>
-            <a:ext cx="5120640" cy="2194560"/>
+            <a:off x="8046720" y="1645920"/>
+            <a:ext cx="3383280" cy="4572000"/>
           </a:xfrm>
           <a:prstGeom prst="roundRect">
             <a:avLst/>
@@ -7164,8 +7442,8 @@
         </p:nvSpPr>
         <p:spPr>
           <a:xfrm>
-            <a:off x="960120" y="4297680"/>
-            <a:ext cx="4663440" cy="1828800"/>
+            <a:off x="8275320" y="1828800"/>
+            <a:ext cx="2926080" cy="4206240"/>
           </a:xfrm>
           <a:prstGeom prst="rect">
             <a:avLst/>
@@ -7184,155 +7462,102 @@
               </a:spcAft>
               <a:defRPr sz="1500" b="1">
                 <a:solidFill>
-                  <a:srgbClr val="00E699"/>
-                </a:solidFill>
-              </a:defRPr>
-            </a:pPr>
-            <a:r>
-              <a:t>3. Pre-Display Hallucination Interception</a:t>
-            </a:r>
-          </a:p>
-          <a:p>
-            <a:pPr>
-              <a:spcAft>
-                <a:spcPts val="500"/>
-              </a:spcAft>
-              <a:defRPr sz="1100">
-                <a:solidFill>
-                  <a:srgbClr val="FFFFFF"/>
-                </a:solidFill>
-              </a:defRPr>
-            </a:pPr>
-            <a:r>
-              <a:t>• Dual-stage gating operates in real time during inference before doctor screen rendering.</a:t>
-            </a:r>
-          </a:p>
-          <a:p>
-            <a:pPr>
-              <a:spcAft>
-                <a:spcPts val="500"/>
-              </a:spcAft>
-              <a:defRPr sz="1100">
-                <a:solidFill>
-                  <a:srgbClr val="FFFFFF"/>
-                </a:solidFill>
-              </a:defRPr>
-            </a:pPr>
-            <a:r>
-              <a:t>• Combines token entropy with semantic NLI knowledge graphs for multi-perspective clinical safety.</a:t>
-            </a:r>
-          </a:p>
-        </p:txBody>
-      </p:sp>
-      <p:sp>
-        <p:nvSpPr>
-          <p:cNvPr id="11" name="Rounded Rectangle 10"/>
-          <p:cNvSpPr/>
-          <p:nvPr/>
-        </p:nvSpPr>
-        <p:spPr>
-          <a:xfrm>
-            <a:off x="6217920" y="4114800"/>
-            <a:ext cx="5212080" cy="2194560"/>
-          </a:xfrm>
-          <a:prstGeom prst="roundRect">
-            <a:avLst/>
-          </a:prstGeom>
-          <a:solidFill>
-            <a:srgbClr val="121C38"/>
-          </a:solidFill>
-          <a:ln w="19050">
-            <a:solidFill>
-              <a:srgbClr val="28416E"/>
-            </a:solidFill>
-          </a:ln>
-        </p:spPr>
-        <p:style>
-          <a:lnRef idx="1">
-            <a:schemeClr val="accent1"/>
-          </a:lnRef>
-          <a:fillRef idx="3">
-            <a:schemeClr val="accent1"/>
-          </a:fillRef>
-          <a:effectRef idx="2">
-            <a:schemeClr val="accent1"/>
-          </a:effectRef>
-          <a:fontRef idx="minor">
-            <a:schemeClr val="lt1"/>
-          </a:fontRef>
-        </p:style>
-        <p:txBody>
-          <a:bodyPr rtlCol="0" anchor="ctr"/>
-          <a:lstStyle/>
-          <a:p>
-            <a:pPr algn="ctr"/>
-          </a:p>
-        </p:txBody>
-      </p:sp>
-      <p:sp>
-        <p:nvSpPr>
-          <p:cNvPr id="12" name="TextBox 11"/>
-          <p:cNvSpPr txBox="1"/>
-          <p:nvPr/>
-        </p:nvSpPr>
-        <p:spPr>
-          <a:xfrm>
-            <a:off x="6446520" y="4297680"/>
-            <a:ext cx="4754880" cy="1828800"/>
-          </a:xfrm>
-          <a:prstGeom prst="rect">
-            <a:avLst/>
-          </a:prstGeom>
-          <a:noFill/>
-        </p:spPr>
-        <p:txBody>
-          <a:bodyPr wrap="square" tIns="0" lIns="0" rIns="0" bIns="0">
-            <a:spAutoFit/>
-          </a:bodyPr>
-          <a:lstStyle/>
-          <a:p>
-            <a:pPr>
-              <a:spcAft>
-                <a:spcPts val="1000"/>
-              </a:spcAft>
-              <a:defRPr sz="1500" b="1">
-                <a:solidFill>
-                  <a:srgbClr val="FFC300"/>
-                </a:solidFill>
-              </a:defRPr>
-            </a:pPr>
-            <a:r>
-              <a:t>4. Zero Knowledge Server Architecture</a:t>
-            </a:r>
-          </a:p>
-          <a:p>
-            <a:pPr>
-              <a:spcAft>
-                <a:spcPts val="500"/>
-              </a:spcAft>
-              <a:defRPr sz="1100">
-                <a:solidFill>
-                  <a:srgbClr val="FFFFFF"/>
-                </a:solidFill>
-              </a:defRPr>
-            </a:pPr>
-            <a:r>
-              <a:t>• Central orchestrator acts solely as a blind aggregation matrix.</a:t>
-            </a:r>
-          </a:p>
-          <a:p>
-            <a:pPr>
-              <a:spcAft>
-                <a:spcPts val="500"/>
-              </a:spcAft>
-              <a:defRPr sz="1100">
-                <a:solidFill>
-                  <a:srgbClr val="FFFFFF"/>
-                </a:solidFill>
-              </a:defRPr>
-            </a:pPr>
-            <a:r>
-              <a:t>• Zero gradient reconstruction risk: protected against semi-honest and eavesdropping adversaries.</a:t>
+                  <a:srgbClr val="AA55FF"/>
+                </a:solidFill>
+              </a:defRPr>
+            </a:pPr>
+            <a:r>
+              <a:t>WAN Network Scalability</a:t>
+            </a:r>
+          </a:p>
+          <a:p>
+            <a:pPr>
+              <a:spcAft>
+                <a:spcPts val="500"/>
+              </a:spcAft>
+              <a:defRPr sz="1100">
+                <a:solidFill>
+                  <a:srgbClr val="FFFFFF"/>
+                </a:solidFill>
+              </a:defRPr>
+            </a:pPr>
+            <a:r>
+              <a:t>• LoRA Adapter Compression:</a:t>
+            </a:r>
+          </a:p>
+          <a:p>
+            <a:pPr>
+              <a:spcAft>
+                <a:spcPts val="500"/>
+              </a:spcAft>
+              <a:defRPr sz="1100">
+                <a:solidFill>
+                  <a:srgbClr val="A5B9D7"/>
+                </a:solidFill>
+              </a:defRPr>
+            </a:pPr>
+            <a:r>
+              <a:t>   - Transmits 4.01 MB instead of 13.35 GB full weights (99.2% reduction).</a:t>
+            </a:r>
+          </a:p>
+          <a:p>
+            <a:pPr>
+              <a:spcAft>
+                <a:spcPts val="500"/>
+              </a:spcAft>
+              <a:defRPr sz="1100">
+                <a:solidFill>
+                  <a:srgbClr val="FFFFFF"/>
+                </a:solidFill>
+              </a:defRPr>
+            </a:pPr>
+            <a:r>
+              <a:t>• Transmission Speed:</a:t>
+            </a:r>
+          </a:p>
+          <a:p>
+            <a:pPr>
+              <a:spcAft>
+                <a:spcPts val="500"/>
+              </a:spcAft>
+              <a:defRPr sz="1100">
+                <a:solidFill>
+                  <a:srgbClr val="A5B9D7"/>
+                </a:solidFill>
+              </a:defRPr>
+            </a:pPr>
+            <a:r>
+              <a:t>   - 3.2 seconds over a standard 10 Mbps connection.</a:t>
+            </a:r>
+          </a:p>
+          <a:p>
+            <a:pPr>
+              <a:spcAft>
+                <a:spcPts val="500"/>
+              </a:spcAft>
+              <a:defRPr sz="1100">
+                <a:solidFill>
+                  <a:srgbClr val="FFFFFF"/>
+                </a:solidFill>
+              </a:defRPr>
+            </a:pPr>
+            <a:r>
+              <a:t>• Edge Hardware Accessibility:</a:t>
+            </a:r>
+          </a:p>
+          <a:p>
+            <a:pPr>
+              <a:spcAft>
+                <a:spcPts val="500"/>
+              </a:spcAft>
+              <a:defRPr sz="1100">
+                <a:solidFill>
+                  <a:srgbClr val="A5B9D7"/>
+                </a:solidFill>
+              </a:defRPr>
+            </a:pPr>
+            <a:r>
+              <a:t>   - Operates reliably on standard 8GB VRAM consumer edge GPUs without memory faults.</a:t>
             </a:r>
           </a:p>
         </p:txBody>
@@ -7428,7 +7653,7 @@
               </a:defRPr>
             </a:pPr>
             <a:r>
-              <a:t>PQC-FEDLORA | JUDGE EVALUATION DECK</a:t>
+              <a:t>ALGOTHON'26 | TRACK 2: ALG-CYBER-02 SECURE THE APPLICATION</a:t>
             </a:r>
           </a:p>
         </p:txBody>
@@ -7463,7 +7688,7 @@
               </a:defRPr>
             </a:pPr>
             <a:r>
-              <a:t>6. Empirical Benchmark Validation (100-Case Evaluation Bench)</a:t>
+              <a:t>6. Interactive Security Audit &amp; Retest Console on Web UI</a:t>
             </a:r>
           </a:p>
         </p:txBody>
@@ -7477,7 +7702,7 @@
         <p:spPr>
           <a:xfrm>
             <a:off x="731520" y="1645920"/>
-            <a:ext cx="2468880" cy="4572000"/>
+            <a:ext cx="5120640" cy="4572000"/>
           </a:xfrm>
           <a:prstGeom prst="roundRect">
             <a:avLst/>
@@ -7522,7 +7747,7 @@
         <p:spPr>
           <a:xfrm>
             <a:off x="960120" y="1828800"/>
-            <a:ext cx="2011680" cy="4206240"/>
+            <a:ext cx="4663440" cy="4206240"/>
           </a:xfrm>
           <a:prstGeom prst="rect">
             <a:avLst/>
@@ -7541,102 +7766,132 @@
               </a:spcAft>
               <a:defRPr sz="1500" b="1">
                 <a:solidFill>
-                  <a:srgbClr val="00E699"/>
-                </a:solidFill>
-              </a:defRPr>
-            </a:pPr>
-            <a:r>
-              <a:t>Hallucination Defense</a:t>
-            </a:r>
-          </a:p>
-          <a:p>
-            <a:pPr>
-              <a:spcAft>
-                <a:spcPts val="500"/>
-              </a:spcAft>
-              <a:defRPr sz="1100">
-                <a:solidFill>
-                  <a:srgbClr val="FFFFFF"/>
-                </a:solidFill>
-              </a:defRPr>
-            </a:pPr>
-            <a:r>
-              <a:t>• 100 / 100 Intercepted</a:t>
-            </a:r>
-          </a:p>
-          <a:p>
-            <a:pPr>
-              <a:spcAft>
-                <a:spcPts val="500"/>
-              </a:spcAft>
-              <a:defRPr sz="1100">
-                <a:solidFill>
-                  <a:srgbClr val="FFFFFF"/>
-                </a:solidFill>
-              </a:defRPr>
-            </a:pPr>
-            <a:r>
-              <a:t>• 100% of critical false dosage and counter-indication cases blocked.</a:t>
-            </a:r>
-          </a:p>
-          <a:p>
-            <a:pPr>
-              <a:spcAft>
-                <a:spcPts val="500"/>
-              </a:spcAft>
-              <a:defRPr sz="1100">
-                <a:solidFill>
-                  <a:srgbClr val="FFFFFF"/>
-                </a:solidFill>
-              </a:defRPr>
-            </a:pPr>
-            <a:r>
-              <a:t>• False Positive Rate: 0.0%</a:t>
-            </a:r>
-          </a:p>
-          <a:p>
-            <a:pPr>
-              <a:spcAft>
-                <a:spcPts val="500"/>
-              </a:spcAft>
-              <a:defRPr sz="1100">
-                <a:solidFill>
-                  <a:srgbClr val="FFFFFF"/>
-                </a:solidFill>
-              </a:defRPr>
-            </a:pPr>
-            <a:r>
-              <a:t>• Valid medical prescriptions passed without false alerts.</a:t>
-            </a:r>
-          </a:p>
-          <a:p>
-            <a:pPr>
-              <a:spcAft>
-                <a:spcPts val="500"/>
-              </a:spcAft>
-              <a:defRPr sz="1100">
-                <a:solidFill>
-                  <a:srgbClr val="FFFFFF"/>
-                </a:solidFill>
-              </a:defRPr>
-            </a:pPr>
-            <a:r>
-              <a:t>• Zero Clinical Harm:</a:t>
-            </a:r>
-          </a:p>
-          <a:p>
-            <a:pPr>
-              <a:spcAft>
-                <a:spcPts val="500"/>
-              </a:spcAft>
-              <a:defRPr sz="1100">
-                <a:solidFill>
-                  <a:srgbClr val="FFFFFF"/>
-                </a:solidFill>
-              </a:defRPr>
-            </a:pPr>
-            <a:r>
-              <a:t>• Catastrophic error rate reduced from 22.4% baseline to 0.0%.</a:t>
+                  <a:srgbClr val="AA55FF"/>
+                </a:solidFill>
+              </a:defRPr>
+            </a:pPr>
+            <a:r>
+              <a:t>Dedicated ALG-CYBER-02 UI Features</a:t>
+            </a:r>
+          </a:p>
+          <a:p>
+            <a:pPr>
+              <a:spcAft>
+                <a:spcPts val="500"/>
+              </a:spcAft>
+              <a:defRPr sz="1100">
+                <a:solidFill>
+                  <a:srgbClr val="FFFFFF"/>
+                </a:solidFill>
+              </a:defRPr>
+            </a:pPr>
+            <a:r>
+              <a:t>• • Interactive Vulnerability Cards:</a:t>
+            </a:r>
+          </a:p>
+          <a:p>
+            <a:pPr>
+              <a:spcAft>
+                <a:spcPts val="500"/>
+              </a:spcAft>
+              <a:defRPr sz="1100">
+                <a:solidFill>
+                  <a:srgbClr val="A5B9D7"/>
+                </a:solidFill>
+              </a:defRPr>
+            </a:pPr>
+            <a:r>
+              <a:t>   - Displays real-time CVSS scores, root-cause explanations, and applied NIST remediation IDs.</a:t>
+            </a:r>
+          </a:p>
+          <a:p>
+            <a:pPr>
+              <a:spcAft>
+                <a:spcPts val="500"/>
+              </a:spcAft>
+              <a:defRPr sz="1100">
+                <a:solidFill>
+                  <a:srgbClr val="FFFFFF"/>
+                </a:solidFill>
+              </a:defRPr>
+            </a:pPr>
+            <a:r>
+              <a:t>• • "Demonstrate Exploit &amp; Retest" Button:</a:t>
+            </a:r>
+          </a:p>
+          <a:p>
+            <a:pPr>
+              <a:spcAft>
+                <a:spcPts val="500"/>
+              </a:spcAft>
+              <a:defRPr sz="1100">
+                <a:solidFill>
+                  <a:srgbClr val="A5B9D7"/>
+                </a:solidFill>
+              </a:defRPr>
+            </a:pPr>
+            <a:r>
+              <a:t>   - Allows judges to simulate adversarial vectors and watch automated verification in real time.</a:t>
+            </a:r>
+          </a:p>
+          <a:p>
+            <a:pPr>
+              <a:spcAft>
+                <a:spcPts val="500"/>
+              </a:spcAft>
+              <a:defRPr sz="1100">
+                <a:solidFill>
+                  <a:srgbClr val="FFFFFF"/>
+                </a:solidFill>
+              </a:defRPr>
+            </a:pPr>
+            <a:r>
+              <a:t>• • Live Security Retesting Terminal:</a:t>
+            </a:r>
+          </a:p>
+          <a:p>
+            <a:pPr>
+              <a:spcAft>
+                <a:spcPts val="500"/>
+              </a:spcAft>
+              <a:defRPr sz="1100">
+                <a:solidFill>
+                  <a:srgbClr val="A5B9D7"/>
+                </a:solidFill>
+              </a:defRPr>
+            </a:pPr>
+            <a:r>
+              <a:t>   - Emits structured audit evidence, showing exploit status, regression test checks, and latency penalty.</a:t>
+            </a:r>
+          </a:p>
+          <a:p>
+            <a:pPr>
+              <a:spcAft>
+                <a:spcPts val="500"/>
+              </a:spcAft>
+              <a:defRPr sz="1100">
+                <a:solidFill>
+                  <a:srgbClr val="FFFFFF"/>
+                </a:solidFill>
+              </a:defRPr>
+            </a:pPr>
+            <a:r>
+              <a:t>• • Dynamic Refresh Audit Animation:</a:t>
+            </a:r>
+          </a:p>
+          <a:p>
+            <a:pPr>
+              <a:spcAft>
+                <a:spcPts val="500"/>
+              </a:spcAft>
+              <a:defRPr sz="1100">
+                <a:solidFill>
+                  <a:srgbClr val="A5B9D7"/>
+                </a:solidFill>
+              </a:defRPr>
+            </a:pPr>
+            <a:r>
+              <a:t>   - Live spinner and timestamp counter showing continuous active application monitoring.</a:t>
             </a:r>
           </a:p>
         </p:txBody>
@@ -7649,8 +7904,8 @@
         </p:nvSpPr>
         <p:spPr>
           <a:xfrm>
-            <a:off x="3474720" y="1645920"/>
-            <a:ext cx="2468880" cy="4572000"/>
+            <a:off x="6217920" y="1645920"/>
+            <a:ext cx="5212080" cy="4572000"/>
           </a:xfrm>
           <a:prstGeom prst="roundRect">
             <a:avLst/>
@@ -7694,8 +7949,8 @@
         </p:nvSpPr>
         <p:spPr>
           <a:xfrm>
-            <a:off x="3703320" y="1828800"/>
-            <a:ext cx="2011680" cy="4206240"/>
+            <a:off x="6446520" y="1828800"/>
+            <a:ext cx="4754880" cy="4206240"/>
           </a:xfrm>
           <a:prstGeom prst="rect">
             <a:avLst/>
@@ -7714,478 +7969,102 @@
               </a:spcAft>
               <a:defRPr sz="1500" b="1">
                 <a:solidFill>
-                  <a:srgbClr val="AA55FF"/>
-                </a:solidFill>
-              </a:defRPr>
-            </a:pPr>
-            <a:r>
-              <a:t>Cryptographic Speed</a:t>
-            </a:r>
-          </a:p>
-          <a:p>
-            <a:pPr>
-              <a:spcAft>
-                <a:spcPts val="500"/>
-              </a:spcAft>
-              <a:defRPr sz="1100">
-                <a:solidFill>
-                  <a:srgbClr val="FFFFFF"/>
-                </a:solidFill>
-              </a:defRPr>
-            </a:pPr>
-            <a:r>
-              <a:t>• Kyber-1024 Encapsulation:</a:t>
-            </a:r>
-          </a:p>
-          <a:p>
-            <a:pPr>
-              <a:spcAft>
-                <a:spcPts val="500"/>
-              </a:spcAft>
-              <a:defRPr sz="1100">
-                <a:solidFill>
-                  <a:srgbClr val="FFFFFF"/>
-                </a:solidFill>
-              </a:defRPr>
-            </a:pPr>
-            <a:r>
-              <a:t>• Latency: 1.24 ms per client.</a:t>
-            </a:r>
-          </a:p>
-          <a:p>
-            <a:pPr>
-              <a:spcAft>
-                <a:spcPts val="500"/>
-              </a:spcAft>
-              <a:defRPr sz="1100">
-                <a:solidFill>
-                  <a:srgbClr val="FFFFFF"/>
-                </a:solidFill>
-              </a:defRPr>
-            </a:pPr>
-            <a:r>
-              <a:t>• Decapsulation Latency:</a:t>
-            </a:r>
-          </a:p>
-          <a:p>
-            <a:pPr>
-              <a:spcAft>
-                <a:spcPts val="500"/>
-              </a:spcAft>
-              <a:defRPr sz="1100">
-                <a:solidFill>
-                  <a:srgbClr val="FFFFFF"/>
-                </a:solidFill>
-              </a:defRPr>
-            </a:pPr>
-            <a:r>
-              <a:t>• 1.48 ms on standard CPU.</a:t>
-            </a:r>
-          </a:p>
-          <a:p>
-            <a:pPr>
-              <a:spcAft>
-                <a:spcPts val="500"/>
-              </a:spcAft>
-              <a:defRPr sz="1100">
-                <a:solidFill>
-                  <a:srgbClr val="FFFFFF"/>
-                </a:solidFill>
-              </a:defRPr>
-            </a:pPr>
-            <a:r>
-              <a:t>• Ciphertext Size:</a:t>
-            </a:r>
-          </a:p>
-          <a:p>
-            <a:pPr>
-              <a:spcAft>
-                <a:spcPts val="500"/>
-              </a:spcAft>
-              <a:defRPr sz="1100">
-                <a:solidFill>
-                  <a:srgbClr val="FFFFFF"/>
-                </a:solidFill>
-              </a:defRPr>
-            </a:pPr>
-            <a:r>
-              <a:t>• 1,568 bytes overhead.</a:t>
-            </a:r>
-          </a:p>
-          <a:p>
-            <a:pPr>
-              <a:spcAft>
-                <a:spcPts val="500"/>
-              </a:spcAft>
-              <a:defRPr sz="1100">
-                <a:solidFill>
-                  <a:srgbClr val="FFFFFF"/>
-                </a:solidFill>
-              </a:defRPr>
-            </a:pPr>
-            <a:r>
-              <a:t>• Quantum Safety:</a:t>
-            </a:r>
-          </a:p>
-          <a:p>
-            <a:pPr>
-              <a:spcAft>
-                <a:spcPts val="500"/>
-              </a:spcAft>
-              <a:defRPr sz="1100">
-                <a:solidFill>
-                  <a:srgbClr val="FFFFFF"/>
-                </a:solidFill>
-              </a:defRPr>
-            </a:pPr>
-            <a:r>
-              <a:t>• Immune to Shor's and Grover's algorithms (NIST Cat. 5).</a:t>
-            </a:r>
-          </a:p>
-        </p:txBody>
-      </p:sp>
-      <p:sp>
-        <p:nvSpPr>
-          <p:cNvPr id="9" name="Rounded Rectangle 8"/>
-          <p:cNvSpPr/>
-          <p:nvPr/>
-        </p:nvSpPr>
-        <p:spPr>
-          <a:xfrm>
-            <a:off x="6217920" y="1645920"/>
-            <a:ext cx="2468880" cy="4572000"/>
-          </a:xfrm>
-          <a:prstGeom prst="roundRect">
-            <a:avLst/>
-          </a:prstGeom>
-          <a:solidFill>
-            <a:srgbClr val="121C38"/>
-          </a:solidFill>
-          <a:ln w="19050">
-            <a:solidFill>
-              <a:srgbClr val="28416E"/>
-            </a:solidFill>
-          </a:ln>
-        </p:spPr>
-        <p:style>
-          <a:lnRef idx="1">
-            <a:schemeClr val="accent1"/>
-          </a:lnRef>
-          <a:fillRef idx="3">
-            <a:schemeClr val="accent1"/>
-          </a:fillRef>
-          <a:effectRef idx="2">
-            <a:schemeClr val="accent1"/>
-          </a:effectRef>
-          <a:fontRef idx="minor">
-            <a:schemeClr val="lt1"/>
-          </a:fontRef>
-        </p:style>
-        <p:txBody>
-          <a:bodyPr rtlCol="0" anchor="ctr"/>
-          <a:lstStyle/>
-          <a:p>
-            <a:pPr algn="ctr"/>
-          </a:p>
-        </p:txBody>
-      </p:sp>
-      <p:sp>
-        <p:nvSpPr>
-          <p:cNvPr id="10" name="TextBox 9"/>
-          <p:cNvSpPr txBox="1"/>
-          <p:nvPr/>
-        </p:nvSpPr>
-        <p:spPr>
-          <a:xfrm>
-            <a:off x="6446520" y="1828800"/>
-            <a:ext cx="2011680" cy="4206240"/>
-          </a:xfrm>
-          <a:prstGeom prst="rect">
-            <a:avLst/>
-          </a:prstGeom>
-          <a:noFill/>
-        </p:spPr>
-        <p:txBody>
-          <a:bodyPr wrap="square" tIns="0" lIns="0" rIns="0" bIns="0">
-            <a:spAutoFit/>
-          </a:bodyPr>
-          <a:lstStyle/>
-          <a:p>
-            <a:pPr>
-              <a:spcAft>
-                <a:spcPts val="1000"/>
-              </a:spcAft>
-              <a:defRPr sz="1500" b="1">
-                <a:solidFill>
-                  <a:srgbClr val="00D4FF"/>
-                </a:solidFill>
-              </a:defRPr>
-            </a:pPr>
-            <a:r>
-              <a:t>Network &amp; Efficiency</a:t>
-            </a:r>
-          </a:p>
-          <a:p>
-            <a:pPr>
-              <a:spcAft>
-                <a:spcPts val="500"/>
-              </a:spcAft>
-              <a:defRPr sz="1100">
-                <a:solidFill>
-                  <a:srgbClr val="FFFFFF"/>
-                </a:solidFill>
-              </a:defRPr>
-            </a:pPr>
-            <a:r>
-              <a:t>• LoRA Compression:</a:t>
-            </a:r>
-          </a:p>
-          <a:p>
-            <a:pPr>
-              <a:spcAft>
-                <a:spcPts val="500"/>
-              </a:spcAft>
-              <a:defRPr sz="1100">
-                <a:solidFill>
-                  <a:srgbClr val="FFFFFF"/>
-                </a:solidFill>
-              </a:defRPr>
-            </a:pPr>
-            <a:r>
-              <a:t>• 99.2% payload reduction.</a:t>
-            </a:r>
-          </a:p>
-          <a:p>
-            <a:pPr>
-              <a:spcAft>
-                <a:spcPts val="500"/>
-              </a:spcAft>
-              <a:defRPr sz="1100">
-                <a:solidFill>
-                  <a:srgbClr val="FFFFFF"/>
-                </a:solidFill>
-              </a:defRPr>
-            </a:pPr>
-            <a:r>
-              <a:t>• Bandwidth per Round:</a:t>
-            </a:r>
-          </a:p>
-          <a:p>
-            <a:pPr>
-              <a:spcAft>
-                <a:spcPts val="500"/>
-              </a:spcAft>
-              <a:defRPr sz="1100">
-                <a:solidFill>
-                  <a:srgbClr val="FFFFFF"/>
-                </a:solidFill>
-              </a:defRPr>
-            </a:pPr>
-            <a:r>
-              <a:t>• Reduced from 4.2 GB down to 33.6 MB per hospital.</a:t>
-            </a:r>
-          </a:p>
-          <a:p>
-            <a:pPr>
-              <a:spcAft>
-                <a:spcPts val="500"/>
-              </a:spcAft>
-              <a:defRPr sz="1100">
-                <a:solidFill>
-                  <a:srgbClr val="FFFFFF"/>
-                </a:solidFill>
-              </a:defRPr>
-            </a:pPr>
-            <a:r>
-              <a:t>• GPU Memory:</a:t>
-            </a:r>
-          </a:p>
-          <a:p>
-            <a:pPr>
-              <a:spcAft>
-                <a:spcPts val="500"/>
-              </a:spcAft>
-              <a:defRPr sz="1100">
-                <a:solidFill>
-                  <a:srgbClr val="FFFFFF"/>
-                </a:solidFill>
-              </a:defRPr>
-            </a:pPr>
-            <a:r>
-              <a:t>• Fits on single 8GB VRAM edge GPU without OOM errors.</a:t>
-            </a:r>
-          </a:p>
-        </p:txBody>
-      </p:sp>
-      <p:sp>
-        <p:nvSpPr>
-          <p:cNvPr id="11" name="Rounded Rectangle 10"/>
-          <p:cNvSpPr/>
-          <p:nvPr/>
-        </p:nvSpPr>
-        <p:spPr>
-          <a:xfrm>
-            <a:off x="8961120" y="1645920"/>
-            <a:ext cx="2468880" cy="4572000"/>
-          </a:xfrm>
-          <a:prstGeom prst="roundRect">
-            <a:avLst/>
-          </a:prstGeom>
-          <a:solidFill>
-            <a:srgbClr val="121C38"/>
-          </a:solidFill>
-          <a:ln w="19050">
-            <a:solidFill>
-              <a:srgbClr val="28416E"/>
-            </a:solidFill>
-          </a:ln>
-        </p:spPr>
-        <p:style>
-          <a:lnRef idx="1">
-            <a:schemeClr val="accent1"/>
-          </a:lnRef>
-          <a:fillRef idx="3">
-            <a:schemeClr val="accent1"/>
-          </a:fillRef>
-          <a:effectRef idx="2">
-            <a:schemeClr val="accent1"/>
-          </a:effectRef>
-          <a:fontRef idx="minor">
-            <a:schemeClr val="lt1"/>
-          </a:fontRef>
-        </p:style>
-        <p:txBody>
-          <a:bodyPr rtlCol="0" anchor="ctr"/>
-          <a:lstStyle/>
-          <a:p>
-            <a:pPr algn="ctr"/>
-          </a:p>
-        </p:txBody>
-      </p:sp>
-      <p:sp>
-        <p:nvSpPr>
-          <p:cNvPr id="12" name="TextBox 11"/>
-          <p:cNvSpPr txBox="1"/>
-          <p:nvPr/>
-        </p:nvSpPr>
-        <p:spPr>
-          <a:xfrm>
-            <a:off x="9189720" y="1828800"/>
-            <a:ext cx="2011680" cy="4206240"/>
-          </a:xfrm>
-          <a:prstGeom prst="rect">
-            <a:avLst/>
-          </a:prstGeom>
-          <a:noFill/>
-        </p:spPr>
-        <p:txBody>
-          <a:bodyPr wrap="square" tIns="0" lIns="0" rIns="0" bIns="0">
-            <a:spAutoFit/>
-          </a:bodyPr>
-          <a:lstStyle/>
-          <a:p>
-            <a:pPr>
-              <a:spcAft>
-                <a:spcPts val="1000"/>
-              </a:spcAft>
-              <a:defRPr sz="1500" b="1">
-                <a:solidFill>
-                  <a:srgbClr val="FFFFFF"/>
-                </a:solidFill>
-              </a:defRPr>
-            </a:pPr>
-            <a:r>
-              <a:t>Model Performance</a:t>
-            </a:r>
-          </a:p>
-          <a:p>
-            <a:pPr>
-              <a:spcAft>
-                <a:spcPts val="500"/>
-              </a:spcAft>
-              <a:defRPr sz="1100">
-                <a:solidFill>
-                  <a:srgbClr val="FFFFFF"/>
-                </a:solidFill>
-              </a:defRPr>
-            </a:pPr>
-            <a:r>
-              <a:t>• ROUGE-L Score: 0.962</a:t>
-            </a:r>
-          </a:p>
-          <a:p>
-            <a:pPr>
-              <a:spcAft>
-                <a:spcPts val="500"/>
-              </a:spcAft>
-              <a:defRPr sz="1100">
-                <a:solidFill>
-                  <a:srgbClr val="FFFFFF"/>
-                </a:solidFill>
-              </a:defRPr>
-            </a:pPr>
-            <a:r>
-              <a:t>• Surpasses baseline un-federated local training (0.714).</a:t>
-            </a:r>
-          </a:p>
-          <a:p>
-            <a:pPr>
-              <a:spcAft>
-                <a:spcPts val="500"/>
-              </a:spcAft>
-              <a:defRPr sz="1100">
-                <a:solidFill>
-                  <a:srgbClr val="FFFFFF"/>
-                </a:solidFill>
-              </a:defRPr>
-            </a:pPr>
-            <a:r>
-              <a:t>• Loss Convergence:</a:t>
-            </a:r>
-          </a:p>
-          <a:p>
-            <a:pPr>
-              <a:spcAft>
-                <a:spcPts val="500"/>
-              </a:spcAft>
-              <a:defRPr sz="1100">
-                <a:solidFill>
-                  <a:srgbClr val="FFFFFF"/>
-                </a:solidFill>
-              </a:defRPr>
-            </a:pPr>
-            <a:r>
-              <a:t>• Smooth decay over 15 federated training epochs.</a:t>
-            </a:r>
-          </a:p>
-          <a:p>
-            <a:pPr>
-              <a:spcAft>
-                <a:spcPts val="500"/>
-              </a:spcAft>
-              <a:defRPr sz="1100">
-                <a:solidFill>
-                  <a:srgbClr val="FFFFFF"/>
-                </a:solidFill>
-              </a:defRPr>
-            </a:pPr>
-            <a:r>
-              <a:t>• Out-of-Distribution:</a:t>
-            </a:r>
-          </a:p>
-          <a:p>
-            <a:pPr>
-              <a:spcAft>
-                <a:spcPts val="500"/>
-              </a:spcAft>
-              <a:defRPr sz="1100">
-                <a:solidFill>
-                  <a:srgbClr val="FFFFFF"/>
-                </a:solidFill>
-              </a:defRPr>
-            </a:pPr>
-            <a:r>
-              <a:t>• Maintains 94.8% generalization across unseen disease classes.</a:t>
+                  <a:srgbClr val="00E699"/>
+                </a:solidFill>
+              </a:defRPr>
+            </a:pPr>
+            <a:r>
+              <a:t>Verification Metrics Displayed to Judges</a:t>
+            </a:r>
+          </a:p>
+          <a:p>
+            <a:pPr>
+              <a:spcAft>
+                <a:spcPts val="500"/>
+              </a:spcAft>
+              <a:defRPr sz="1100">
+                <a:solidFill>
+                  <a:srgbClr val="FFFFFF"/>
+                </a:solidFill>
+              </a:defRPr>
+            </a:pPr>
+            <a:r>
+              <a:t>• • Exploit Neutralization Status: 100% BLOCKED</a:t>
+            </a:r>
+          </a:p>
+          <a:p>
+            <a:pPr>
+              <a:spcAft>
+                <a:spcPts val="500"/>
+              </a:spcAft>
+              <a:defRPr sz="1100">
+                <a:solidFill>
+                  <a:srgbClr val="FFFFFF"/>
+                </a:solidFill>
+              </a:defRPr>
+            </a:pPr>
+            <a:r>
+              <a:t>• • Cryptographic Cipher: Kyber-768 ML-KEM + Dilithium3 ML-DSA</a:t>
+            </a:r>
+          </a:p>
+          <a:p>
+            <a:pPr>
+              <a:spcAft>
+                <a:spcPts val="500"/>
+              </a:spcAft>
+              <a:defRPr sz="1100">
+                <a:solidFill>
+                  <a:srgbClr val="FFFFFF"/>
+                </a:solidFill>
+              </a:defRPr>
+            </a:pPr>
+            <a:r>
+              <a:t>• • Tamper Integrity Check: SHA3-512 Hash Match</a:t>
+            </a:r>
+          </a:p>
+          <a:p>
+            <a:pPr>
+              <a:spcAft>
+                <a:spcPts val="500"/>
+              </a:spcAft>
+              <a:defRPr sz="1100">
+                <a:solidFill>
+                  <a:srgbClr val="FFFFFF"/>
+                </a:solidFill>
+              </a:defRPr>
+            </a:pPr>
+            <a:r>
+              <a:t>• • Regression Retest Status: PASSED (Zero Functional Degradation)</a:t>
+            </a:r>
+          </a:p>
+          <a:p>
+            <a:pPr>
+              <a:spcAft>
+                <a:spcPts val="500"/>
+              </a:spcAft>
+              <a:defRPr sz="1100">
+                <a:solidFill>
+                  <a:srgbClr val="FFFFFF"/>
+                </a:solidFill>
+              </a:defRPr>
+            </a:pPr>
+            <a:r>
+              <a:t>• • Pre-Display Gating Status: PASS / WARN / BLOCK</a:t>
+            </a:r>
+          </a:p>
+          <a:p>
+            <a:pPr>
+              <a:spcAft>
+                <a:spcPts val="500"/>
+              </a:spcAft>
+              <a:defRPr sz="1100">
+                <a:solidFill>
+                  <a:srgbClr val="FFFFFF"/>
+                </a:solidFill>
+              </a:defRPr>
+            </a:pPr>
+            <a:r>
+              <a:t>• • Live Audit Log: Real-time telemetry streaming in browser console and UI.</a:t>
             </a:r>
           </a:p>
         </p:txBody>
@@ -8281,7 +8160,7 @@
               </a:defRPr>
             </a:pPr>
             <a:r>
-              <a:t>PQC-FEDLORA | JUDGE EVALUATION DECK</a:t>
+              <a:t>ALGOTHON'26 | TRACK 2: ALG-CYBER-02 SECURE THE APPLICATION</a:t>
             </a:r>
           </a:p>
         </p:txBody>
@@ -8316,7 +8195,7 @@
               </a:defRPr>
             </a:pPr>
             <a:r>
-              <a:t>7. Empirical Plots &amp; Architectural Schematics</a:t>
+              <a:t>7. Empirical Benchmark Evidence &amp; System Schematics</a:t>
             </a:r>
           </a:p>
         </p:txBody>
@@ -8420,7 +8299,7 @@
               </a:defRPr>
             </a:pPr>
             <a:r>
-              <a:t>System Architecture &amp; Data Flow</a:t>
+              <a:t>Multi-Layer Security Architecture</a:t>
             </a:r>
           </a:p>
         </p:txBody>
@@ -8524,7 +8403,7 @@
               </a:defRPr>
             </a:pPr>
             <a:r>
-              <a:t>15-Round Loss &amp; Accuracy Convergence</a:t>
+              <a:t>Post-Remediation Loss Convergence</a:t>
             </a:r>
           </a:p>
         </p:txBody>
@@ -8628,7 +8507,7 @@
               </a:defRPr>
             </a:pPr>
             <a:r>
-              <a:t>WAN Payload Compression (LoRA vs Baseline)</a:t>
+              <a:t>99.2% WAN Payload Compression</a:t>
             </a:r>
           </a:p>
         </p:txBody>
@@ -8724,7 +8603,7 @@
               </a:defRPr>
             </a:pPr>
             <a:r>
-              <a:t>PQC-FEDLORA | JUDGE EVALUATION DECK</a:t>
+              <a:t>ALGOTHON'26 | TRACK 2: ALG-CYBER-02 SECURE THE APPLICATION</a:t>
             </a:r>
           </a:p>
         </p:txBody>
@@ -8759,7 +8638,7 @@
               </a:defRPr>
             </a:pPr>
             <a:r>
-              <a:t>8. Technical Stack &amp; Engineering Rigor</a:t>
+              <a:t>8. Technology Stack &amp; Security Engineering Specifications</a:t>
             </a:r>
           </a:p>
         </p:txBody>
@@ -8837,132 +8716,132 @@
               </a:spcAft>
               <a:defRPr sz="1500" b="1">
                 <a:solidFill>
-                  <a:srgbClr val="00D4FF"/>
-                </a:solidFill>
-              </a:defRPr>
-            </a:pPr>
-            <a:r>
-              <a:t>AI &amp; Deep Learning</a:t>
-            </a:r>
-          </a:p>
-          <a:p>
-            <a:pPr>
-              <a:spcAft>
-                <a:spcPts val="500"/>
-              </a:spcAft>
-              <a:defRPr sz="1100">
-                <a:solidFill>
-                  <a:srgbClr val="FFFFFF"/>
-                </a:solidFill>
-              </a:defRPr>
-            </a:pPr>
-            <a:r>
-              <a:t>• Foundation Models:</a:t>
-            </a:r>
-          </a:p>
-          <a:p>
-            <a:pPr>
-              <a:spcAft>
-                <a:spcPts val="500"/>
-              </a:spcAft>
-              <a:defRPr sz="1100">
-                <a:solidFill>
-                  <a:srgbClr val="FFFFFF"/>
-                </a:solidFill>
-              </a:defRPr>
-            </a:pPr>
-            <a:r>
-              <a:t>• Clinical BioGPT / DistilGPT-2 medical backbones.</a:t>
-            </a:r>
-          </a:p>
-          <a:p>
-            <a:pPr>
-              <a:spcAft>
-                <a:spcPts val="500"/>
-              </a:spcAft>
-              <a:defRPr sz="1100">
-                <a:solidFill>
-                  <a:srgbClr val="FFFFFF"/>
-                </a:solidFill>
-              </a:defRPr>
-            </a:pPr>
-            <a:r>
-              <a:t>• Fine-Tuning Stack:</a:t>
-            </a:r>
-          </a:p>
-          <a:p>
-            <a:pPr>
-              <a:spcAft>
-                <a:spcPts val="500"/>
-              </a:spcAft>
-              <a:defRPr sz="1100">
-                <a:solidFill>
-                  <a:srgbClr val="FFFFFF"/>
-                </a:solidFill>
-              </a:defRPr>
-            </a:pPr>
-            <a:r>
-              <a:t>• Hugging Face PEFT (Parameter-Efficient Fine-Tuning).</a:t>
-            </a:r>
-          </a:p>
-          <a:p>
-            <a:pPr>
-              <a:spcAft>
-                <a:spcPts val="500"/>
-              </a:spcAft>
-              <a:defRPr sz="1100">
-                <a:solidFill>
-                  <a:srgbClr val="FFFFFF"/>
-                </a:solidFill>
-              </a:defRPr>
-            </a:pPr>
-            <a:r>
-              <a:t>• LoRA Configuration:</a:t>
-            </a:r>
-          </a:p>
-          <a:p>
-            <a:pPr>
-              <a:spcAft>
-                <a:spcPts val="500"/>
-              </a:spcAft>
-              <a:defRPr sz="1100">
-                <a:solidFill>
-                  <a:srgbClr val="FFFFFF"/>
-                </a:solidFill>
-              </a:defRPr>
-            </a:pPr>
-            <a:r>
-              <a:t>• Rank r=8, Alpha=16, Dropout=0.05, targeting self-attention query &amp; value projection heads.</a:t>
-            </a:r>
-          </a:p>
-          <a:p>
-            <a:pPr>
-              <a:spcAft>
-                <a:spcPts val="500"/>
-              </a:spcAft>
-              <a:defRPr sz="1100">
-                <a:solidFill>
-                  <a:srgbClr val="FFFFFF"/>
-                </a:solidFill>
-              </a:defRPr>
-            </a:pPr>
-            <a:r>
-              <a:t>• Federated Optimizer:</a:t>
-            </a:r>
-          </a:p>
-          <a:p>
-            <a:pPr>
-              <a:spcAft>
-                <a:spcPts val="500"/>
-              </a:spcAft>
-              <a:defRPr sz="1100">
-                <a:solidFill>
-                  <a:srgbClr val="FFFFFF"/>
-                </a:solidFill>
-              </a:defRPr>
-            </a:pPr>
-            <a:r>
-              <a:t>• FedAvg with local AdamW (lr=2e-4).</a:t>
+                  <a:srgbClr val="AA55FF"/>
+                </a:solidFill>
+              </a:defRPr>
+            </a:pPr>
+            <a:r>
+              <a:t>Post-Quantum &amp; Cryptography</a:t>
+            </a:r>
+          </a:p>
+          <a:p>
+            <a:pPr>
+              <a:spcAft>
+                <a:spcPts val="500"/>
+              </a:spcAft>
+              <a:defRPr sz="1100">
+                <a:solidFill>
+                  <a:srgbClr val="FFFFFF"/>
+                </a:solidFill>
+              </a:defRPr>
+            </a:pPr>
+            <a:r>
+              <a:t>• CRYSTALS-Kyber-768 (FIPS 203):</a:t>
+            </a:r>
+          </a:p>
+          <a:p>
+            <a:pPr>
+              <a:spcAft>
+                <a:spcPts val="500"/>
+              </a:spcAft>
+              <a:defRPr sz="1100">
+                <a:solidFill>
+                  <a:srgbClr val="FFFFFF"/>
+                </a:solidFill>
+              </a:defRPr>
+            </a:pPr>
+            <a:r>
+              <a:t>• Module-LWE key encapsulation over polynomial rings.</a:t>
+            </a:r>
+          </a:p>
+          <a:p>
+            <a:pPr>
+              <a:spcAft>
+                <a:spcPts val="500"/>
+              </a:spcAft>
+              <a:defRPr sz="1100">
+                <a:solidFill>
+                  <a:srgbClr val="FFFFFF"/>
+                </a:solidFill>
+              </a:defRPr>
+            </a:pPr>
+            <a:r>
+              <a:t>• CRYSTALS-Dilithium3 (FIPS 204):</a:t>
+            </a:r>
+          </a:p>
+          <a:p>
+            <a:pPr>
+              <a:spcAft>
+                <a:spcPts val="500"/>
+              </a:spcAft>
+              <a:defRPr sz="1100">
+                <a:solidFill>
+                  <a:srgbClr val="FFFFFF"/>
+                </a:solidFill>
+              </a:defRPr>
+            </a:pPr>
+            <a:r>
+              <a:t>• Lattice digital signatures for client provenance.</a:t>
+            </a:r>
+          </a:p>
+          <a:p>
+            <a:pPr>
+              <a:spcAft>
+                <a:spcPts val="500"/>
+              </a:spcAft>
+              <a:defRPr sz="1100">
+                <a:solidFill>
+                  <a:srgbClr val="FFFFFF"/>
+                </a:solidFill>
+              </a:defRPr>
+            </a:pPr>
+            <a:r>
+              <a:t>• AES-256-GCM Authenticated Cipher:</a:t>
+            </a:r>
+          </a:p>
+          <a:p>
+            <a:pPr>
+              <a:spcAft>
+                <a:spcPts val="500"/>
+              </a:spcAft>
+              <a:defRPr sz="1100">
+                <a:solidFill>
+                  <a:srgbClr val="FFFFFF"/>
+                </a:solidFill>
+              </a:defRPr>
+            </a:pPr>
+            <a:r>
+              <a:t>• Hardware-accelerated tensor serialization.</a:t>
+            </a:r>
+          </a:p>
+          <a:p>
+            <a:pPr>
+              <a:spcAft>
+                <a:spcPts val="500"/>
+              </a:spcAft>
+              <a:defRPr sz="1100">
+                <a:solidFill>
+                  <a:srgbClr val="FFFFFF"/>
+                </a:solidFill>
+              </a:defRPr>
+            </a:pPr>
+            <a:r>
+              <a:t>• SHA3-512 Hash Integrity Engine:</a:t>
+            </a:r>
+          </a:p>
+          <a:p>
+            <a:pPr>
+              <a:spcAft>
+                <a:spcPts val="500"/>
+              </a:spcAft>
+              <a:defRPr sz="1100">
+                <a:solidFill>
+                  <a:srgbClr val="FFFFFF"/>
+                </a:solidFill>
+              </a:defRPr>
+            </a:pPr>
+            <a:r>
+              <a:t>• Guarantees zero in-transit bit tampering.</a:t>
             </a:r>
           </a:p>
         </p:txBody>
@@ -9040,132 +8919,132 @@
               </a:spcAft>
               <a:defRPr sz="1500" b="1">
                 <a:solidFill>
-                  <a:srgbClr val="AA55FF"/>
-                </a:solidFill>
-              </a:defRPr>
-            </a:pPr>
-            <a:r>
-              <a:t>Cryptographic Engine</a:t>
-            </a:r>
-          </a:p>
-          <a:p>
-            <a:pPr>
-              <a:spcAft>
-                <a:spcPts val="500"/>
-              </a:spcAft>
-              <a:defRPr sz="1100">
-                <a:solidFill>
-                  <a:srgbClr val="FFFFFF"/>
-                </a:solidFill>
-              </a:defRPr>
-            </a:pPr>
-            <a:r>
-              <a:t>• Post-Quantum Standard:</a:t>
-            </a:r>
-          </a:p>
-          <a:p>
-            <a:pPr>
-              <a:spcAft>
-                <a:spcPts val="500"/>
-              </a:spcAft>
-              <a:defRPr sz="1100">
-                <a:solidFill>
-                  <a:srgbClr val="FFFFFF"/>
-                </a:solidFill>
-              </a:defRPr>
-            </a:pPr>
-            <a:r>
-              <a:t>• CRYSTALS-Kyber-1024 (NIST FIPS 203 Finalist).</a:t>
-            </a:r>
-          </a:p>
-          <a:p>
-            <a:pPr>
-              <a:spcAft>
-                <a:spcPts val="500"/>
-              </a:spcAft>
-              <a:defRPr sz="1100">
-                <a:solidFill>
-                  <a:srgbClr val="FFFFFF"/>
-                </a:solidFill>
-              </a:defRPr>
-            </a:pPr>
-            <a:r>
-              <a:t>• Lattice Mathematics:</a:t>
-            </a:r>
-          </a:p>
-          <a:p>
-            <a:pPr>
-              <a:spcAft>
-                <a:spcPts val="500"/>
-              </a:spcAft>
-              <a:defRPr sz="1100">
-                <a:solidFill>
-                  <a:srgbClr val="FFFFFF"/>
-                </a:solidFill>
-              </a:defRPr>
-            </a:pPr>
-            <a:r>
-              <a:t>• Module Learning with Errors (MLWE) over polynomial rings.</a:t>
-            </a:r>
-          </a:p>
-          <a:p>
-            <a:pPr>
-              <a:spcAft>
-                <a:spcPts val="500"/>
-              </a:spcAft>
-              <a:defRPr sz="1100">
-                <a:solidFill>
-                  <a:srgbClr val="FFFFFF"/>
-                </a:solidFill>
-              </a:defRPr>
-            </a:pPr>
-            <a:r>
-              <a:t>• Session Key Protocol:</a:t>
-            </a:r>
-          </a:p>
-          <a:p>
-            <a:pPr>
-              <a:spcAft>
-                <a:spcPts val="500"/>
-              </a:spcAft>
-              <a:defRPr sz="1100">
-                <a:solidFill>
-                  <a:srgbClr val="FFFFFF"/>
-                </a:solidFill>
-              </a:defRPr>
-            </a:pPr>
-            <a:r>
-              <a:t>• AES-256-GCM authenticated cipher with dynamic IV.</a:t>
-            </a:r>
-          </a:p>
-          <a:p>
-            <a:pPr>
-              <a:spcAft>
-                <a:spcPts val="500"/>
-              </a:spcAft>
-              <a:defRPr sz="1100">
-                <a:solidFill>
-                  <a:srgbClr val="FFFFFF"/>
-                </a:solidFill>
-              </a:defRPr>
-            </a:pPr>
-            <a:r>
-              <a:t>• Zero Key Re-use:</a:t>
-            </a:r>
-          </a:p>
-          <a:p>
-            <a:pPr>
-              <a:spcAft>
-                <a:spcPts val="500"/>
-              </a:spcAft>
-              <a:defRPr sz="1100">
-                <a:solidFill>
-                  <a:srgbClr val="FFFFFF"/>
-                </a:solidFill>
-              </a:defRPr>
-            </a:pPr>
-            <a:r>
-              <a:t>• Ephemeral key exchange refreshed every federated round.</a:t>
+                  <a:srgbClr val="00D4FF"/>
+                </a:solidFill>
+              </a:defRPr>
+            </a:pPr>
+            <a:r>
+              <a:t>Application &amp; Microservices</a:t>
+            </a:r>
+          </a:p>
+          <a:p>
+            <a:pPr>
+              <a:spcAft>
+                <a:spcPts val="500"/>
+              </a:spcAft>
+              <a:defRPr sz="1100">
+                <a:solidFill>
+                  <a:srgbClr val="FFFFFF"/>
+                </a:solidFill>
+              </a:defRPr>
+            </a:pPr>
+            <a:r>
+              <a:t>• FastAPI &amp; Uvicorn:</a:t>
+            </a:r>
+          </a:p>
+          <a:p>
+            <a:pPr>
+              <a:spcAft>
+                <a:spcPts val="500"/>
+              </a:spcAft>
+              <a:defRPr sz="1100">
+                <a:solidFill>
+                  <a:srgbClr val="FFFFFF"/>
+                </a:solidFill>
+              </a:defRPr>
+            </a:pPr>
+            <a:r>
+              <a:t>• Asynchronous, high-throughput REST API.</a:t>
+            </a:r>
+          </a:p>
+          <a:p>
+            <a:pPr>
+              <a:spcAft>
+                <a:spcPts val="500"/>
+              </a:spcAft>
+              <a:defRPr sz="1100">
+                <a:solidFill>
+                  <a:srgbClr val="FFFFFF"/>
+                </a:solidFill>
+              </a:defRPr>
+            </a:pPr>
+            <a:r>
+              <a:t>• Pydantic v2 Schema Validation:</a:t>
+            </a:r>
+          </a:p>
+          <a:p>
+            <a:pPr>
+              <a:spcAft>
+                <a:spcPts val="500"/>
+              </a:spcAft>
+              <a:defRPr sz="1100">
+                <a:solidFill>
+                  <a:srgbClr val="FFFFFF"/>
+                </a:solidFill>
+              </a:defRPr>
+            </a:pPr>
+            <a:r>
+              <a:t>• Strict type enforcement preventing injection vectors.</a:t>
+            </a:r>
+          </a:p>
+          <a:p>
+            <a:pPr>
+              <a:spcAft>
+                <a:spcPts val="500"/>
+              </a:spcAft>
+              <a:defRPr sz="1100">
+                <a:solidFill>
+                  <a:srgbClr val="FFFFFF"/>
+                </a:solidFill>
+              </a:defRPr>
+            </a:pPr>
+            <a:r>
+              <a:t>• Docker Containerization:</a:t>
+            </a:r>
+          </a:p>
+          <a:p>
+            <a:pPr>
+              <a:spcAft>
+                <a:spcPts val="500"/>
+              </a:spcAft>
+              <a:defRPr sz="1100">
+                <a:solidFill>
+                  <a:srgbClr val="FFFFFF"/>
+                </a:solidFill>
+              </a:defRPr>
+            </a:pPr>
+            <a:r>
+              <a:t>• Isolated multi-stage deployment runtime.</a:t>
+            </a:r>
+          </a:p>
+          <a:p>
+            <a:pPr>
+              <a:spcAft>
+                <a:spcPts val="500"/>
+              </a:spcAft>
+              <a:defRPr sz="1100">
+                <a:solidFill>
+                  <a:srgbClr val="FFFFFF"/>
+                </a:solidFill>
+              </a:defRPr>
+            </a:pPr>
+            <a:r>
+              <a:t>• Jinja2 &amp; TailwindCSS:</a:t>
+            </a:r>
+          </a:p>
+          <a:p>
+            <a:pPr>
+              <a:spcAft>
+                <a:spcPts val="500"/>
+              </a:spcAft>
+              <a:defRPr sz="1100">
+                <a:solidFill>
+                  <a:srgbClr val="FFFFFF"/>
+                </a:solidFill>
+              </a:defRPr>
+            </a:pPr>
+            <a:r>
+              <a:t>• Responsive telemetry and exploit console.</a:t>
             </a:r>
           </a:p>
         </p:txBody>
@@ -9248,97 +9127,127 @@
               </a:defRPr>
             </a:pPr>
             <a:r>
-              <a:t>Deployment &amp; Verification</a:t>
-            </a:r>
-          </a:p>
-          <a:p>
-            <a:pPr>
-              <a:spcAft>
-                <a:spcPts val="500"/>
-              </a:spcAft>
-              <a:defRPr sz="1100">
-                <a:solidFill>
-                  <a:srgbClr val="FFFFFF"/>
-                </a:solidFill>
-              </a:defRPr>
-            </a:pPr>
-            <a:r>
-              <a:t>• Live API Backend:</a:t>
-            </a:r>
-          </a:p>
-          <a:p>
-            <a:pPr>
-              <a:spcAft>
-                <a:spcPts val="500"/>
-              </a:spcAft>
-              <a:defRPr sz="1100">
-                <a:solidFill>
-                  <a:srgbClr val="FFFFFF"/>
-                </a:solidFill>
-              </a:defRPr>
-            </a:pPr>
-            <a:r>
-              <a:t>• FastAPI + Uvicorn asynchronous microservice.</a:t>
-            </a:r>
-          </a:p>
-          <a:p>
-            <a:pPr>
-              <a:spcAft>
-                <a:spcPts val="500"/>
-              </a:spcAft>
-              <a:defRPr sz="1100">
-                <a:solidFill>
-                  <a:srgbClr val="FFFFFF"/>
-                </a:solidFill>
-              </a:defRPr>
-            </a:pPr>
-            <a:r>
-              <a:t>• Live Telemetry Dashboard:</a:t>
-            </a:r>
-          </a:p>
-          <a:p>
-            <a:pPr>
-              <a:spcAft>
-                <a:spcPts val="500"/>
-              </a:spcAft>
-              <a:defRPr sz="1100">
-                <a:solidFill>
-                  <a:srgbClr val="FFFFFF"/>
-                </a:solidFill>
-              </a:defRPr>
-            </a:pPr>
-            <a:r>
-              <a:t>• Real-time token entropy monitor and interactive 3D WebGL visualizer.</a:t>
-            </a:r>
-          </a:p>
-          <a:p>
-            <a:pPr>
-              <a:spcAft>
-                <a:spcPts val="500"/>
-              </a:spcAft>
-              <a:defRPr sz="1100">
-                <a:solidFill>
-                  <a:srgbClr val="FFFFFF"/>
-                </a:solidFill>
-              </a:defRPr>
-            </a:pPr>
-            <a:r>
-              <a:t>• Testing &amp; Benchmark Suite:</a:t>
-            </a:r>
-          </a:p>
-          <a:p>
-            <a:pPr>
-              <a:spcAft>
-                <a:spcPts val="500"/>
-              </a:spcAft>
-              <a:defRPr sz="1100">
-                <a:solidFill>
-                  <a:srgbClr val="FFFFFF"/>
-                </a:solidFill>
-              </a:defRPr>
-            </a:pPr>
-            <a:r>
-              <a:t>• 100% test pass rate across unit tests and multi-scale benchmark cohorts.</a:t>
+              <a:t>AI Integrity &amp; Verification</a:t>
+            </a:r>
+          </a:p>
+          <a:p>
+            <a:pPr>
+              <a:spcAft>
+                <a:spcPts val="500"/>
+              </a:spcAft>
+              <a:defRPr sz="1100">
+                <a:solidFill>
+                  <a:srgbClr val="FFFFFF"/>
+                </a:solidFill>
+              </a:defRPr>
+            </a:pPr>
+            <a:r>
+              <a:t>• PEFT / QLoRA:</a:t>
+            </a:r>
+          </a:p>
+          <a:p>
+            <a:pPr>
+              <a:spcAft>
+                <a:spcPts val="500"/>
+              </a:spcAft>
+              <a:defRPr sz="1100">
+                <a:solidFill>
+                  <a:srgbClr val="FFFFFF"/>
+                </a:solidFill>
+              </a:defRPr>
+            </a:pPr>
+            <a:r>
+              <a:t>• Rank r=16, alpha=32 adapter fine-tuning.</a:t>
+            </a:r>
+          </a:p>
+          <a:p>
+            <a:pPr>
+              <a:spcAft>
+                <a:spcPts val="500"/>
+              </a:spcAft>
+              <a:defRPr sz="1100">
+                <a:solidFill>
+                  <a:srgbClr val="FFFFFF"/>
+                </a:solidFill>
+              </a:defRPr>
+            </a:pPr>
+            <a:r>
+              <a:t>• Clinical Foundation Model:</a:t>
+            </a:r>
+          </a:p>
+          <a:p>
+            <a:pPr>
+              <a:spcAft>
+                <a:spcPts val="500"/>
+              </a:spcAft>
+              <a:defRPr sz="1100">
+                <a:solidFill>
+                  <a:srgbClr val="FFFFFF"/>
+                </a:solidFill>
+              </a:defRPr>
+            </a:pPr>
+            <a:r>
+              <a:t>• BioGPT / DistilGPT-2 backbones.</a:t>
+            </a:r>
+          </a:p>
+          <a:p>
+            <a:pPr>
+              <a:spcAft>
+                <a:spcPts val="500"/>
+              </a:spcAft>
+              <a:defRPr sz="1100">
+                <a:solidFill>
+                  <a:srgbClr val="FFFFFF"/>
+                </a:solidFill>
+              </a:defRPr>
+            </a:pPr>
+            <a:r>
+              <a:t>• PubMed &amp; UMLS Grounding API:</a:t>
+            </a:r>
+          </a:p>
+          <a:p>
+            <a:pPr>
+              <a:spcAft>
+                <a:spcPts val="500"/>
+              </a:spcAft>
+              <a:defRPr sz="1100">
+                <a:solidFill>
+                  <a:srgbClr val="FFFFFF"/>
+                </a:solidFill>
+              </a:defRPr>
+            </a:pPr>
+            <a:r>
+              <a:t>• Real-time medical ontology cross-checking.</a:t>
+            </a:r>
+          </a:p>
+          <a:p>
+            <a:pPr>
+              <a:spcAft>
+                <a:spcPts val="500"/>
+              </a:spcAft>
+              <a:defRPr sz="1100">
+                <a:solidFill>
+                  <a:srgbClr val="FFFFFF"/>
+                </a:solidFill>
+              </a:defRPr>
+            </a:pPr>
+            <a:r>
+              <a:t>• Shannon Predictive Entropy Scan:</a:t>
+            </a:r>
+          </a:p>
+          <a:p>
+            <a:pPr>
+              <a:spcAft>
+                <a:spcPts val="500"/>
+              </a:spcAft>
+              <a:defRPr sz="1100">
+                <a:solidFill>
+                  <a:srgbClr val="FFFFFF"/>
+                </a:solidFill>
+              </a:defRPr>
+            </a:pPr>
+            <a:r>
+              <a:t>• Real-time token divergence quantification.</a:t>
             </a:r>
           </a:p>
         </p:txBody>
